--- a/output/wordlabs-sweet-3day.pptx
+++ b/output/wordlabs-sweet-3day.pptx
@@ -4240,7 +4240,7 @@
                 <a:ea typeface="Calibri" pitchFamily="34" charset="-122"/>
                 <a:cs typeface="Calibri" pitchFamily="34" charset="-120"/>
               </a:rPr>
-              <a:t>"having a pleasant sugary taste"</a:t>
+              <a:t>"pleasant sugary taste or smell"</a:t>
             </a:r>
             <a:endParaRPr lang="en-US" sz="2200" dirty="0"/>
           </a:p>
@@ -5288,7 +5288,7 @@
                 <a:ea typeface="Calibri" pitchFamily="34" charset="-122"/>
                 <a:cs typeface="Calibri" pitchFamily="34" charset="-120"/>
               </a:rPr>
-              <a:t>Word Labs  •  wordlabs.app  •  Root: 'sweet' = having a pleasant sugary taste</a:t>
+              <a:t>Word Labs  •  wordlabs.app  •  Root: 'sweet' = pleasant sugary taste or smell</a:t>
             </a:r>
             <a:endParaRPr lang="en-US" sz="800" dirty="0"/>
           </a:p>
@@ -5622,7 +5622,7 @@
                 <a:ea typeface="Trebuchet MS" pitchFamily="34" charset="-122"/>
                 <a:cs typeface="Trebuchet MS" pitchFamily="34" charset="-120"/>
               </a:rPr>
-              <a:t>2</a:t>
+              <a:t>1</a:t>
             </a:r>
             <a:pPr algn="ctr" indent="0" marL="0">
               <a:buNone/>
@@ -5636,7 +5636,7 @@
                 <a:ea typeface="Trebuchet MS" pitchFamily="34" charset="-122"/>
                 <a:cs typeface="Trebuchet MS" pitchFamily="34" charset="-120"/>
               </a:rPr>
-              <a:t>  punctuation marks</a:t>
+              <a:t>  punctuation mark</a:t>
             </a:r>
             <a:endParaRPr lang="en-US" sz="2800" dirty="0"/>
           </a:p>
@@ -5928,7 +5928,7 @@
                 <a:ea typeface="Calibri" pitchFamily="34" charset="-122"/>
                 <a:cs typeface="Calibri" pitchFamily="34" charset="-120"/>
               </a:rPr>
-              <a:t>Word Labs  •  wordlabs.app  •  Root: 'sweet' = having a pleasant sugary taste</a:t>
+              <a:t>Word Labs  •  wordlabs.app  •  Root: 'sweet' = pleasant sugary taste or smell</a:t>
             </a:r>
             <a:endParaRPr lang="en-US" sz="800" dirty="0"/>
           </a:p>
@@ -6057,7 +6057,7 @@
                 <a:ea typeface="Calibri" pitchFamily="34" charset="-122"/>
                 <a:cs typeface="Calibri" pitchFamily="34" charset="-120"/>
               </a:rPr>
-              <a:t>sweetness</a:t>
+              <a:t>unsweetened</a:t>
             </a:r>
             <a:pPr algn="l" indent="0" marL="0">
               <a:buNone/>
@@ -6071,7 +6071,7 @@
                 <a:ea typeface="Calibri" pitchFamily="34" charset="-122"/>
                 <a:cs typeface="Calibri" pitchFamily="34" charset="-120"/>
               </a:rPr>
-              <a:t> of the ripe strawberries made everyone smile, and Mia said it was the </a:t>
+              <a:t> lemonade was still delicious, and the </a:t>
             </a:r>
             <a:pPr algn="l" indent="0" marL="0">
               <a:buNone/>
@@ -6088,7 +6088,7 @@
                 <a:ea typeface="Calibri" pitchFamily="34" charset="-122"/>
                 <a:cs typeface="Calibri" pitchFamily="34" charset="-120"/>
               </a:rPr>
-              <a:t>sweetest</a:t>
+              <a:t>sweetness</a:t>
             </a:r>
             <a:pPr algn="l" indent="0" marL="0">
               <a:buNone/>
@@ -6102,7 +6102,7 @@
                 <a:ea typeface="Calibri" pitchFamily="34" charset="-122"/>
                 <a:cs typeface="Calibri" pitchFamily="34" charset="-120"/>
               </a:rPr>
-              <a:t> fruit she had ever tasted!</a:t>
+              <a:t> of the berries made up for it.</a:t>
             </a:r>
             <a:endParaRPr lang="en-US" sz="1800" dirty="0"/>
           </a:p>
@@ -6257,7 +6257,7 @@
                 <a:ea typeface="Trebuchet MS" pitchFamily="34" charset="-122"/>
                 <a:cs typeface="Trebuchet MS" pitchFamily="34" charset="-120"/>
               </a:rPr>
-              <a:t>sweetness</a:t>
+              <a:t>unsweetened</a:t>
             </a:r>
             <a:endParaRPr lang="en-US" sz="1400" dirty="0"/>
           </a:p>
@@ -6385,7 +6385,7 @@
                 <a:ea typeface="Trebuchet MS" pitchFamily="34" charset="-122"/>
                 <a:cs typeface="Trebuchet MS" pitchFamily="34" charset="-120"/>
               </a:rPr>
-              <a:t>sweetest</a:t>
+              <a:t>sweetness</a:t>
             </a:r>
             <a:endParaRPr lang="en-US" sz="1400" dirty="0"/>
           </a:p>
@@ -6716,7 +6716,7 @@
                 <a:ea typeface="Calibri" pitchFamily="34" charset="-122"/>
                 <a:cs typeface="Calibri" pitchFamily="34" charset="-120"/>
               </a:rPr>
-              <a:t>Word Labs  •  wordlabs.app  •  Root: 'sweet' = having a pleasant sugary taste</a:t>
+              <a:t>Word Labs  •  wordlabs.app  •  Root: 'sweet' = pleasant sugary taste or smell</a:t>
             </a:r>
             <a:endParaRPr lang="en-US" sz="800" dirty="0"/>
           </a:p>
@@ -6855,7 +6855,7 @@
                 <a:ea typeface="Trebuchet MS" pitchFamily="34" charset="-122"/>
                 <a:cs typeface="Trebuchet MS" pitchFamily="34" charset="-120"/>
               </a:rPr>
-              <a:t>sweetness</a:t>
+              <a:t>unsweetened</a:t>
             </a:r>
             <a:endParaRPr lang="en-US" sz="2800" dirty="0"/>
           </a:p>
@@ -7543,7 +7543,7 @@
                 <a:ea typeface="Calibri" pitchFamily="34" charset="-122"/>
                 <a:cs typeface="Calibri" pitchFamily="34" charset="-120"/>
               </a:rPr>
-              <a:t>Word Labs  •  wordlabs.app  •  Root: 'sweet' = having a pleasant sugary taste</a:t>
+              <a:t>Word Labs  •  wordlabs.app  •  Root: 'sweet' = pleasant sugary taste or smell</a:t>
             </a:r>
             <a:endParaRPr lang="en-US" sz="800" dirty="0"/>
           </a:p>
@@ -7682,7 +7682,7 @@
                 <a:ea typeface="Trebuchet MS" pitchFamily="34" charset="-122"/>
                 <a:cs typeface="Trebuchet MS" pitchFamily="34" charset="-120"/>
               </a:rPr>
-              <a:t>sweetness</a:t>
+              <a:t>unsweetened</a:t>
             </a:r>
             <a:endParaRPr lang="en-US" sz="2800" dirty="0"/>
           </a:p>
@@ -7762,8 +7762,8 @@
         </p:nvSpPr>
         <p:spPr>
           <a:xfrm>
-            <a:off x="2938272" y="2258568"/>
-            <a:ext cx="1828800" cy="292608"/>
+            <a:off x="1989734" y="2258568"/>
+            <a:ext cx="1581912" cy="292608"/>
           </a:xfrm>
           <a:prstGeom prst="rect">
             <a:avLst>
@@ -7771,11 +7771,11 @@
             </a:avLst>
           </a:prstGeom>
           <a:solidFill>
-            <a:srgbClr val="CCFBF1"/>
+            <a:srgbClr val="DDD6FE"/>
           </a:solidFill>
           <a:ln w="19050">
             <a:solidFill>
-              <a:srgbClr val="0D9488"/>
+              <a:srgbClr val="7C3AED"/>
             </a:solidFill>
             <a:prstDash val="solid"/>
           </a:ln>
@@ -7796,8 +7796,8 @@
         </p:nvSpPr>
         <p:spPr>
           <a:xfrm>
-            <a:off x="2938272" y="2258568"/>
-            <a:ext cx="1828800" cy="292608"/>
+            <a:off x="1989734" y="2258568"/>
+            <a:ext cx="1581912" cy="292608"/>
           </a:xfrm>
           <a:prstGeom prst="rect">
             <a:avLst/>
@@ -7815,13 +7815,13 @@
             <a:r>
               <a:rPr lang="en-US" sz="1300" b="1" dirty="0">
                 <a:solidFill>
-                  <a:srgbClr val="0F766E"/>
+                  <a:srgbClr val="4C1D95"/>
                 </a:solidFill>
                 <a:latin typeface="Trebuchet MS" pitchFamily="34" charset="0"/>
                 <a:ea typeface="Trebuchet MS" pitchFamily="34" charset="-122"/>
                 <a:cs typeface="Trebuchet MS" pitchFamily="34" charset="-120"/>
               </a:rPr>
-              <a:t>sweet</a:t>
+              <a:t>un</a:t>
             </a:r>
             <a:endParaRPr lang="en-US" sz="1300" dirty="0"/>
           </a:p>
@@ -7835,8 +7835,8 @@
         </p:nvSpPr>
         <p:spPr>
           <a:xfrm>
-            <a:off x="2938272" y="2569464"/>
-            <a:ext cx="1828800" cy="201168"/>
+            <a:off x="1989734" y="2569464"/>
+            <a:ext cx="1581912" cy="201168"/>
           </a:xfrm>
           <a:prstGeom prst="rect">
             <a:avLst/>
@@ -7860,7 +7860,7 @@
                 <a:ea typeface="Calibri" pitchFamily="34" charset="-122"/>
                 <a:cs typeface="Calibri" pitchFamily="34" charset="-120"/>
               </a:rPr>
-              <a:t>pleasant sugary taste</a:t>
+              <a:t>not</a:t>
             </a:r>
             <a:endParaRPr lang="en-US" sz="850" dirty="0"/>
           </a:p>
@@ -7874,8 +7874,8 @@
         </p:nvSpPr>
         <p:spPr>
           <a:xfrm>
-            <a:off x="5803392" y="2258568"/>
-            <a:ext cx="1828800" cy="292608"/>
+            <a:off x="3659429" y="2258568"/>
+            <a:ext cx="1581912" cy="292608"/>
           </a:xfrm>
           <a:prstGeom prst="rect">
             <a:avLst>
@@ -7883,11 +7883,11 @@
             </a:avLst>
           </a:prstGeom>
           <a:solidFill>
-            <a:srgbClr val="FCE7F3"/>
+            <a:srgbClr val="CCFBF1"/>
           </a:solidFill>
           <a:ln w="19050">
             <a:solidFill>
-              <a:srgbClr val="DB2777"/>
+              <a:srgbClr val="0D9488"/>
             </a:solidFill>
             <a:prstDash val="solid"/>
           </a:ln>
@@ -7908,8 +7908,8 @@
         </p:nvSpPr>
         <p:spPr>
           <a:xfrm>
-            <a:off x="5803392" y="2258568"/>
-            <a:ext cx="1828800" cy="292608"/>
+            <a:off x="3659429" y="2258568"/>
+            <a:ext cx="1581912" cy="292608"/>
           </a:xfrm>
           <a:prstGeom prst="rect">
             <a:avLst/>
@@ -7927,13 +7927,13 @@
             <a:r>
               <a:rPr lang="en-US" sz="1300" b="1" dirty="0">
                 <a:solidFill>
-                  <a:srgbClr val="9D174D"/>
+                  <a:srgbClr val="0F766E"/>
                 </a:solidFill>
                 <a:latin typeface="Trebuchet MS" pitchFamily="34" charset="0"/>
                 <a:ea typeface="Trebuchet MS" pitchFamily="34" charset="-122"/>
                 <a:cs typeface="Trebuchet MS" pitchFamily="34" charset="-120"/>
               </a:rPr>
-              <a:t>ness</a:t>
+              <a:t>sweet</a:t>
             </a:r>
             <a:endParaRPr lang="en-US" sz="1300" dirty="0"/>
           </a:p>
@@ -7947,8 +7947,8 @@
         </p:nvSpPr>
         <p:spPr>
           <a:xfrm>
-            <a:off x="5803392" y="2569464"/>
-            <a:ext cx="1828800" cy="201168"/>
+            <a:off x="3659429" y="2569464"/>
+            <a:ext cx="1581912" cy="201168"/>
           </a:xfrm>
           <a:prstGeom prst="rect">
             <a:avLst/>
@@ -7972,7 +7972,7 @@
                 <a:ea typeface="Calibri" pitchFamily="34" charset="-122"/>
                 <a:cs typeface="Calibri" pitchFamily="34" charset="-120"/>
               </a:rPr>
-              <a:t>quality or state of</a:t>
+              <a:t>pleasant sugary taste</a:t>
             </a:r>
             <a:endParaRPr lang="en-US" sz="850" dirty="0"/>
           </a:p>
@@ -7981,6 +7981,230 @@
       <p:sp>
         <p:nvSpPr>
           <p:cNvPr id="22" name="Shape 20"/>
+          <p:cNvSpPr/>
+          <p:nvPr/>
+        </p:nvSpPr>
+        <p:spPr>
+          <a:xfrm>
+            <a:off x="5329123" y="2258568"/>
+            <a:ext cx="1581912" cy="292608"/>
+          </a:xfrm>
+          <a:prstGeom prst="rect">
+            <a:avLst>
+              <a:gd name="adj" fmla="val 25000"/>
+            </a:avLst>
+          </a:prstGeom>
+          <a:solidFill>
+            <a:srgbClr val="FCE7F3"/>
+          </a:solidFill>
+          <a:ln w="19050">
+            <a:solidFill>
+              <a:srgbClr val="DB2777"/>
+            </a:solidFill>
+            <a:prstDash val="solid"/>
+          </a:ln>
+          <a:effectLst>
+            <a:outerShdw sx="100000" sy="100000" kx="0" ky="0" algn="bl" rotWithShape="0" blurRad="101600" dist="38100" dir="8100000">
+              <a:srgbClr val="000000">
+                <a:alpha val="12000"/>
+              </a:srgbClr>
+            </a:outerShdw>
+          </a:effectLst>
+        </p:spPr>
+      </p:sp>
+      <p:sp>
+        <p:nvSpPr>
+          <p:cNvPr id="23" name="Text 21"/>
+          <p:cNvSpPr/>
+          <p:nvPr/>
+        </p:nvSpPr>
+        <p:spPr>
+          <a:xfrm>
+            <a:off x="5329123" y="2258568"/>
+            <a:ext cx="1581912" cy="292608"/>
+          </a:xfrm>
+          <a:prstGeom prst="rect">
+            <a:avLst/>
+          </a:prstGeom>
+          <a:noFill/>
+          <a:ln/>
+        </p:spPr>
+        <p:txBody>
+          <a:bodyPr wrap="square" lIns="0" tIns="0" rIns="0" bIns="0" rtlCol="0" anchor="ctr"/>
+          <a:lstStyle/>
+          <a:p>
+            <a:pPr algn="ctr" indent="0" marL="0">
+              <a:buNone/>
+            </a:pPr>
+            <a:r>
+              <a:rPr lang="en-US" sz="1300" b="1" dirty="0">
+                <a:solidFill>
+                  <a:srgbClr val="9D174D"/>
+                </a:solidFill>
+                <a:latin typeface="Trebuchet MS" pitchFamily="34" charset="0"/>
+                <a:ea typeface="Trebuchet MS" pitchFamily="34" charset="-122"/>
+                <a:cs typeface="Trebuchet MS" pitchFamily="34" charset="-120"/>
+              </a:rPr>
+              <a:t>en</a:t>
+            </a:r>
+            <a:endParaRPr lang="en-US" sz="1300" dirty="0"/>
+          </a:p>
+        </p:txBody>
+      </p:sp>
+      <p:sp>
+        <p:nvSpPr>
+          <p:cNvPr id="24" name="Text 22"/>
+          <p:cNvSpPr/>
+          <p:nvPr/>
+        </p:nvSpPr>
+        <p:spPr>
+          <a:xfrm>
+            <a:off x="5329123" y="2569464"/>
+            <a:ext cx="1581912" cy="201168"/>
+          </a:xfrm>
+          <a:prstGeom prst="rect">
+            <a:avLst/>
+          </a:prstGeom>
+          <a:noFill/>
+          <a:ln/>
+        </p:spPr>
+        <p:txBody>
+          <a:bodyPr wrap="square" lIns="0" tIns="0" rIns="0" bIns="0" rtlCol="0" anchor="t"/>
+          <a:lstStyle/>
+          <a:p>
+            <a:pPr algn="ctr" indent="0" marL="0">
+              <a:buNone/>
+            </a:pPr>
+            <a:r>
+              <a:rPr lang="en-US" sz="850" dirty="0">
+                <a:solidFill>
+                  <a:srgbClr val="475569"/>
+                </a:solidFill>
+                <a:latin typeface="Calibri" pitchFamily="34" charset="0"/>
+                <a:ea typeface="Calibri" pitchFamily="34" charset="-122"/>
+                <a:cs typeface="Calibri" pitchFamily="34" charset="-120"/>
+              </a:rPr>
+              <a:t>to make</a:t>
+            </a:r>
+            <a:endParaRPr lang="en-US" sz="850" dirty="0"/>
+          </a:p>
+        </p:txBody>
+      </p:sp>
+      <p:sp>
+        <p:nvSpPr>
+          <p:cNvPr id="25" name="Shape 23"/>
+          <p:cNvSpPr/>
+          <p:nvPr/>
+        </p:nvSpPr>
+        <p:spPr>
+          <a:xfrm>
+            <a:off x="6998818" y="2258568"/>
+            <a:ext cx="1581912" cy="292608"/>
+          </a:xfrm>
+          <a:prstGeom prst="rect">
+            <a:avLst>
+              <a:gd name="adj" fmla="val 25000"/>
+            </a:avLst>
+          </a:prstGeom>
+          <a:solidFill>
+            <a:srgbClr val="FCE7F3"/>
+          </a:solidFill>
+          <a:ln w="19050">
+            <a:solidFill>
+              <a:srgbClr val="DB2777"/>
+            </a:solidFill>
+            <a:prstDash val="solid"/>
+          </a:ln>
+          <a:effectLst>
+            <a:outerShdw sx="100000" sy="100000" kx="0" ky="0" algn="bl" rotWithShape="0" blurRad="101600" dist="38100" dir="8100000">
+              <a:srgbClr val="000000">
+                <a:alpha val="12000"/>
+              </a:srgbClr>
+            </a:outerShdw>
+          </a:effectLst>
+        </p:spPr>
+      </p:sp>
+      <p:sp>
+        <p:nvSpPr>
+          <p:cNvPr id="26" name="Text 24"/>
+          <p:cNvSpPr/>
+          <p:nvPr/>
+        </p:nvSpPr>
+        <p:spPr>
+          <a:xfrm>
+            <a:off x="6998818" y="2258568"/>
+            <a:ext cx="1581912" cy="292608"/>
+          </a:xfrm>
+          <a:prstGeom prst="rect">
+            <a:avLst/>
+          </a:prstGeom>
+          <a:noFill/>
+          <a:ln/>
+        </p:spPr>
+        <p:txBody>
+          <a:bodyPr wrap="square" lIns="0" tIns="0" rIns="0" bIns="0" rtlCol="0" anchor="ctr"/>
+          <a:lstStyle/>
+          <a:p>
+            <a:pPr algn="ctr" indent="0" marL="0">
+              <a:buNone/>
+            </a:pPr>
+            <a:r>
+              <a:rPr lang="en-US" sz="1300" b="1" dirty="0">
+                <a:solidFill>
+                  <a:srgbClr val="9D174D"/>
+                </a:solidFill>
+                <a:latin typeface="Trebuchet MS" pitchFamily="34" charset="0"/>
+                <a:ea typeface="Trebuchet MS" pitchFamily="34" charset="-122"/>
+                <a:cs typeface="Trebuchet MS" pitchFamily="34" charset="-120"/>
+              </a:rPr>
+              <a:t>ed</a:t>
+            </a:r>
+            <a:endParaRPr lang="en-US" sz="1300" dirty="0"/>
+          </a:p>
+        </p:txBody>
+      </p:sp>
+      <p:sp>
+        <p:nvSpPr>
+          <p:cNvPr id="27" name="Text 25"/>
+          <p:cNvSpPr/>
+          <p:nvPr/>
+        </p:nvSpPr>
+        <p:spPr>
+          <a:xfrm>
+            <a:off x="6998818" y="2569464"/>
+            <a:ext cx="1581912" cy="201168"/>
+          </a:xfrm>
+          <a:prstGeom prst="rect">
+            <a:avLst/>
+          </a:prstGeom>
+          <a:noFill/>
+          <a:ln/>
+        </p:spPr>
+        <p:txBody>
+          <a:bodyPr wrap="square" lIns="0" tIns="0" rIns="0" bIns="0" rtlCol="0" anchor="t"/>
+          <a:lstStyle/>
+          <a:p>
+            <a:pPr algn="ctr" indent="0" marL="0">
+              <a:buNone/>
+            </a:pPr>
+            <a:r>
+              <a:rPr lang="en-US" sz="850" dirty="0">
+                <a:solidFill>
+                  <a:srgbClr val="475569"/>
+                </a:solidFill>
+                <a:latin typeface="Calibri" pitchFamily="34" charset="0"/>
+                <a:ea typeface="Calibri" pitchFamily="34" charset="-122"/>
+                <a:cs typeface="Calibri" pitchFamily="34" charset="-120"/>
+              </a:rPr>
+              <a:t>past tense / done</a:t>
+            </a:r>
+            <a:endParaRPr lang="en-US" sz="850" dirty="0"/>
+          </a:p>
+        </p:txBody>
+      </p:sp>
+      <p:sp>
+        <p:nvSpPr>
+          <p:cNvPr id="28" name="Shape 26"/>
           <p:cNvSpPr/>
           <p:nvPr/>
         </p:nvSpPr>
@@ -8007,7 +8231,7 @@
       </p:sp>
       <p:sp>
         <p:nvSpPr>
-          <p:cNvPr id="23" name="Text 21"/>
+          <p:cNvPr id="29" name="Text 27"/>
           <p:cNvSpPr/>
           <p:nvPr/>
         </p:nvSpPr>
@@ -8046,7 +8270,7 @@
       </p:sp>
       <p:sp>
         <p:nvSpPr>
-          <p:cNvPr id="24" name="Shape 22"/>
+          <p:cNvPr id="30" name="Shape 28"/>
           <p:cNvSpPr/>
           <p:nvPr/>
         </p:nvSpPr>
@@ -8073,7 +8297,7 @@
       </p:sp>
       <p:sp>
         <p:nvSpPr>
-          <p:cNvPr id="25" name="Text 23"/>
+          <p:cNvPr id="31" name="Text 29"/>
           <p:cNvSpPr/>
           <p:nvPr/>
         </p:nvSpPr>
@@ -8112,7 +8336,7 @@
       </p:sp>
       <p:sp>
         <p:nvSpPr>
-          <p:cNvPr id="26" name="Shape 24"/>
+          <p:cNvPr id="32" name="Shape 30"/>
           <p:cNvSpPr/>
           <p:nvPr/>
         </p:nvSpPr>
@@ -8139,7 +8363,7 @@
       </p:sp>
       <p:sp>
         <p:nvSpPr>
-          <p:cNvPr id="27" name="Text 25"/>
+          <p:cNvPr id="33" name="Text 31"/>
           <p:cNvSpPr/>
           <p:nvPr/>
         </p:nvSpPr>
@@ -8178,7 +8402,7 @@
       </p:sp>
       <p:sp>
         <p:nvSpPr>
-          <p:cNvPr id="28" name="Shape 26"/>
+          <p:cNvPr id="34" name="Shape 32"/>
           <p:cNvSpPr/>
           <p:nvPr/>
         </p:nvSpPr>
@@ -8205,7 +8429,7 @@
       </p:sp>
       <p:sp>
         <p:nvSpPr>
-          <p:cNvPr id="29" name="Text 27"/>
+          <p:cNvPr id="35" name="Text 33"/>
           <p:cNvSpPr/>
           <p:nvPr/>
         </p:nvSpPr>
@@ -8528,7 +8752,7 @@
                 <a:ea typeface="Calibri" pitchFamily="34" charset="-122"/>
                 <a:cs typeface="Calibri" pitchFamily="34" charset="-120"/>
               </a:rPr>
-              <a:t>Word Labs  •  wordlabs.app  •  Root: 'sweet' = having a pleasant sugary taste</a:t>
+              <a:t>Word Labs  •  wordlabs.app  •  Root: 'sweet' = pleasant sugary taste or smell</a:t>
             </a:r>
             <a:endParaRPr lang="en-US" sz="800" dirty="0"/>
           </a:p>
@@ -8667,7 +8891,7 @@
                 <a:ea typeface="Trebuchet MS" pitchFamily="34" charset="-122"/>
                 <a:cs typeface="Trebuchet MS" pitchFamily="34" charset="-120"/>
               </a:rPr>
-              <a:t>sweetness</a:t>
+              <a:t>unsweetened</a:t>
             </a:r>
             <a:endParaRPr lang="en-US" sz="2800" dirty="0"/>
           </a:p>
@@ -8747,8 +8971,8 @@
         </p:nvSpPr>
         <p:spPr>
           <a:xfrm>
-            <a:off x="2938272" y="2258568"/>
-            <a:ext cx="1828800" cy="292608"/>
+            <a:off x="1989734" y="2258568"/>
+            <a:ext cx="1581912" cy="292608"/>
           </a:xfrm>
           <a:prstGeom prst="rect">
             <a:avLst>
@@ -8756,11 +8980,11 @@
             </a:avLst>
           </a:prstGeom>
           <a:solidFill>
-            <a:srgbClr val="CCFBF1"/>
+            <a:srgbClr val="DDD6FE"/>
           </a:solidFill>
           <a:ln w="19050">
             <a:solidFill>
-              <a:srgbClr val="0D9488"/>
+              <a:srgbClr val="7C3AED"/>
             </a:solidFill>
             <a:prstDash val="solid"/>
           </a:ln>
@@ -8781,8 +9005,8 @@
         </p:nvSpPr>
         <p:spPr>
           <a:xfrm>
-            <a:off x="2938272" y="2258568"/>
-            <a:ext cx="1828800" cy="292608"/>
+            <a:off x="1989734" y="2258568"/>
+            <a:ext cx="1581912" cy="292608"/>
           </a:xfrm>
           <a:prstGeom prst="rect">
             <a:avLst/>
@@ -8800,13 +9024,13 @@
             <a:r>
               <a:rPr lang="en-US" sz="1300" b="1" dirty="0">
                 <a:solidFill>
-                  <a:srgbClr val="0F766E"/>
+                  <a:srgbClr val="4C1D95"/>
                 </a:solidFill>
                 <a:latin typeface="Trebuchet MS" pitchFamily="34" charset="0"/>
                 <a:ea typeface="Trebuchet MS" pitchFamily="34" charset="-122"/>
                 <a:cs typeface="Trebuchet MS" pitchFamily="34" charset="-120"/>
               </a:rPr>
-              <a:t>sweet</a:t>
+              <a:t>un</a:t>
             </a:r>
             <a:endParaRPr lang="en-US" sz="1300" dirty="0"/>
           </a:p>
@@ -8820,8 +9044,8 @@
         </p:nvSpPr>
         <p:spPr>
           <a:xfrm>
-            <a:off x="2938272" y="2569464"/>
-            <a:ext cx="1828800" cy="201168"/>
+            <a:off x="1989734" y="2569464"/>
+            <a:ext cx="1581912" cy="201168"/>
           </a:xfrm>
           <a:prstGeom prst="rect">
             <a:avLst/>
@@ -8845,7 +9069,7 @@
                 <a:ea typeface="Calibri" pitchFamily="34" charset="-122"/>
                 <a:cs typeface="Calibri" pitchFamily="34" charset="-120"/>
               </a:rPr>
-              <a:t>pleasant sugary taste</a:t>
+              <a:t>not</a:t>
             </a:r>
             <a:endParaRPr lang="en-US" sz="850" dirty="0"/>
           </a:p>
@@ -8859,8 +9083,8 @@
         </p:nvSpPr>
         <p:spPr>
           <a:xfrm>
-            <a:off x="5803392" y="2258568"/>
-            <a:ext cx="1828800" cy="292608"/>
+            <a:off x="3659429" y="2258568"/>
+            <a:ext cx="1581912" cy="292608"/>
           </a:xfrm>
           <a:prstGeom prst="rect">
             <a:avLst>
@@ -8868,11 +9092,11 @@
             </a:avLst>
           </a:prstGeom>
           <a:solidFill>
-            <a:srgbClr val="FCE7F3"/>
+            <a:srgbClr val="CCFBF1"/>
           </a:solidFill>
           <a:ln w="19050">
             <a:solidFill>
-              <a:srgbClr val="DB2777"/>
+              <a:srgbClr val="0D9488"/>
             </a:solidFill>
             <a:prstDash val="solid"/>
           </a:ln>
@@ -8893,8 +9117,8 @@
         </p:nvSpPr>
         <p:spPr>
           <a:xfrm>
-            <a:off x="5803392" y="2258568"/>
-            <a:ext cx="1828800" cy="292608"/>
+            <a:off x="3659429" y="2258568"/>
+            <a:ext cx="1581912" cy="292608"/>
           </a:xfrm>
           <a:prstGeom prst="rect">
             <a:avLst/>
@@ -8912,13 +9136,13 @@
             <a:r>
               <a:rPr lang="en-US" sz="1300" b="1" dirty="0">
                 <a:solidFill>
-                  <a:srgbClr val="9D174D"/>
+                  <a:srgbClr val="0F766E"/>
                 </a:solidFill>
                 <a:latin typeface="Trebuchet MS" pitchFamily="34" charset="0"/>
                 <a:ea typeface="Trebuchet MS" pitchFamily="34" charset="-122"/>
                 <a:cs typeface="Trebuchet MS" pitchFamily="34" charset="-120"/>
               </a:rPr>
-              <a:t>ness</a:t>
+              <a:t>sweet</a:t>
             </a:r>
             <a:endParaRPr lang="en-US" sz="1300" dirty="0"/>
           </a:p>
@@ -8932,8 +9156,8 @@
         </p:nvSpPr>
         <p:spPr>
           <a:xfrm>
-            <a:off x="5803392" y="2569464"/>
-            <a:ext cx="1828800" cy="201168"/>
+            <a:off x="3659429" y="2569464"/>
+            <a:ext cx="1581912" cy="201168"/>
           </a:xfrm>
           <a:prstGeom prst="rect">
             <a:avLst/>
@@ -8957,7 +9181,7 @@
                 <a:ea typeface="Calibri" pitchFamily="34" charset="-122"/>
                 <a:cs typeface="Calibri" pitchFamily="34" charset="-120"/>
               </a:rPr>
-              <a:t>quality or state of</a:t>
+              <a:t>pleasant sugary taste</a:t>
             </a:r>
             <a:endParaRPr lang="en-US" sz="850" dirty="0"/>
           </a:p>
@@ -8966,6 +9190,230 @@
       <p:sp>
         <p:nvSpPr>
           <p:cNvPr id="22" name="Shape 20"/>
+          <p:cNvSpPr/>
+          <p:nvPr/>
+        </p:nvSpPr>
+        <p:spPr>
+          <a:xfrm>
+            <a:off x="5329123" y="2258568"/>
+            <a:ext cx="1581912" cy="292608"/>
+          </a:xfrm>
+          <a:prstGeom prst="rect">
+            <a:avLst>
+              <a:gd name="adj" fmla="val 25000"/>
+            </a:avLst>
+          </a:prstGeom>
+          <a:solidFill>
+            <a:srgbClr val="FCE7F3"/>
+          </a:solidFill>
+          <a:ln w="19050">
+            <a:solidFill>
+              <a:srgbClr val="DB2777"/>
+            </a:solidFill>
+            <a:prstDash val="solid"/>
+          </a:ln>
+          <a:effectLst>
+            <a:outerShdw sx="100000" sy="100000" kx="0" ky="0" algn="bl" rotWithShape="0" blurRad="101600" dist="38100" dir="8100000">
+              <a:srgbClr val="000000">
+                <a:alpha val="12000"/>
+              </a:srgbClr>
+            </a:outerShdw>
+          </a:effectLst>
+        </p:spPr>
+      </p:sp>
+      <p:sp>
+        <p:nvSpPr>
+          <p:cNvPr id="23" name="Text 21"/>
+          <p:cNvSpPr/>
+          <p:nvPr/>
+        </p:nvSpPr>
+        <p:spPr>
+          <a:xfrm>
+            <a:off x="5329123" y="2258568"/>
+            <a:ext cx="1581912" cy="292608"/>
+          </a:xfrm>
+          <a:prstGeom prst="rect">
+            <a:avLst/>
+          </a:prstGeom>
+          <a:noFill/>
+          <a:ln/>
+        </p:spPr>
+        <p:txBody>
+          <a:bodyPr wrap="square" lIns="0" tIns="0" rIns="0" bIns="0" rtlCol="0" anchor="ctr"/>
+          <a:lstStyle/>
+          <a:p>
+            <a:pPr algn="ctr" indent="0" marL="0">
+              <a:buNone/>
+            </a:pPr>
+            <a:r>
+              <a:rPr lang="en-US" sz="1300" b="1" dirty="0">
+                <a:solidFill>
+                  <a:srgbClr val="9D174D"/>
+                </a:solidFill>
+                <a:latin typeface="Trebuchet MS" pitchFamily="34" charset="0"/>
+                <a:ea typeface="Trebuchet MS" pitchFamily="34" charset="-122"/>
+                <a:cs typeface="Trebuchet MS" pitchFamily="34" charset="-120"/>
+              </a:rPr>
+              <a:t>en</a:t>
+            </a:r>
+            <a:endParaRPr lang="en-US" sz="1300" dirty="0"/>
+          </a:p>
+        </p:txBody>
+      </p:sp>
+      <p:sp>
+        <p:nvSpPr>
+          <p:cNvPr id="24" name="Text 22"/>
+          <p:cNvSpPr/>
+          <p:nvPr/>
+        </p:nvSpPr>
+        <p:spPr>
+          <a:xfrm>
+            <a:off x="5329123" y="2569464"/>
+            <a:ext cx="1581912" cy="201168"/>
+          </a:xfrm>
+          <a:prstGeom prst="rect">
+            <a:avLst/>
+          </a:prstGeom>
+          <a:noFill/>
+          <a:ln/>
+        </p:spPr>
+        <p:txBody>
+          <a:bodyPr wrap="square" lIns="0" tIns="0" rIns="0" bIns="0" rtlCol="0" anchor="t"/>
+          <a:lstStyle/>
+          <a:p>
+            <a:pPr algn="ctr" indent="0" marL="0">
+              <a:buNone/>
+            </a:pPr>
+            <a:r>
+              <a:rPr lang="en-US" sz="850" dirty="0">
+                <a:solidFill>
+                  <a:srgbClr val="475569"/>
+                </a:solidFill>
+                <a:latin typeface="Calibri" pitchFamily="34" charset="0"/>
+                <a:ea typeface="Calibri" pitchFamily="34" charset="-122"/>
+                <a:cs typeface="Calibri" pitchFamily="34" charset="-120"/>
+              </a:rPr>
+              <a:t>to make</a:t>
+            </a:r>
+            <a:endParaRPr lang="en-US" sz="850" dirty="0"/>
+          </a:p>
+        </p:txBody>
+      </p:sp>
+      <p:sp>
+        <p:nvSpPr>
+          <p:cNvPr id="25" name="Shape 23"/>
+          <p:cNvSpPr/>
+          <p:nvPr/>
+        </p:nvSpPr>
+        <p:spPr>
+          <a:xfrm>
+            <a:off x="6998818" y="2258568"/>
+            <a:ext cx="1581912" cy="292608"/>
+          </a:xfrm>
+          <a:prstGeom prst="rect">
+            <a:avLst>
+              <a:gd name="adj" fmla="val 25000"/>
+            </a:avLst>
+          </a:prstGeom>
+          <a:solidFill>
+            <a:srgbClr val="FCE7F3"/>
+          </a:solidFill>
+          <a:ln w="19050">
+            <a:solidFill>
+              <a:srgbClr val="DB2777"/>
+            </a:solidFill>
+            <a:prstDash val="solid"/>
+          </a:ln>
+          <a:effectLst>
+            <a:outerShdw sx="100000" sy="100000" kx="0" ky="0" algn="bl" rotWithShape="0" blurRad="101600" dist="38100" dir="8100000">
+              <a:srgbClr val="000000">
+                <a:alpha val="12000"/>
+              </a:srgbClr>
+            </a:outerShdw>
+          </a:effectLst>
+        </p:spPr>
+      </p:sp>
+      <p:sp>
+        <p:nvSpPr>
+          <p:cNvPr id="26" name="Text 24"/>
+          <p:cNvSpPr/>
+          <p:nvPr/>
+        </p:nvSpPr>
+        <p:spPr>
+          <a:xfrm>
+            <a:off x="6998818" y="2258568"/>
+            <a:ext cx="1581912" cy="292608"/>
+          </a:xfrm>
+          <a:prstGeom prst="rect">
+            <a:avLst/>
+          </a:prstGeom>
+          <a:noFill/>
+          <a:ln/>
+        </p:spPr>
+        <p:txBody>
+          <a:bodyPr wrap="square" lIns="0" tIns="0" rIns="0" bIns="0" rtlCol="0" anchor="ctr"/>
+          <a:lstStyle/>
+          <a:p>
+            <a:pPr algn="ctr" indent="0" marL="0">
+              <a:buNone/>
+            </a:pPr>
+            <a:r>
+              <a:rPr lang="en-US" sz="1300" b="1" dirty="0">
+                <a:solidFill>
+                  <a:srgbClr val="9D174D"/>
+                </a:solidFill>
+                <a:latin typeface="Trebuchet MS" pitchFamily="34" charset="0"/>
+                <a:ea typeface="Trebuchet MS" pitchFamily="34" charset="-122"/>
+                <a:cs typeface="Trebuchet MS" pitchFamily="34" charset="-120"/>
+              </a:rPr>
+              <a:t>ed</a:t>
+            </a:r>
+            <a:endParaRPr lang="en-US" sz="1300" dirty="0"/>
+          </a:p>
+        </p:txBody>
+      </p:sp>
+      <p:sp>
+        <p:nvSpPr>
+          <p:cNvPr id="27" name="Text 25"/>
+          <p:cNvSpPr/>
+          <p:nvPr/>
+        </p:nvSpPr>
+        <p:spPr>
+          <a:xfrm>
+            <a:off x="6998818" y="2569464"/>
+            <a:ext cx="1581912" cy="201168"/>
+          </a:xfrm>
+          <a:prstGeom prst="rect">
+            <a:avLst/>
+          </a:prstGeom>
+          <a:noFill/>
+          <a:ln/>
+        </p:spPr>
+        <p:txBody>
+          <a:bodyPr wrap="square" lIns="0" tIns="0" rIns="0" bIns="0" rtlCol="0" anchor="t"/>
+          <a:lstStyle/>
+          <a:p>
+            <a:pPr algn="ctr" indent="0" marL="0">
+              <a:buNone/>
+            </a:pPr>
+            <a:r>
+              <a:rPr lang="en-US" sz="850" dirty="0">
+                <a:solidFill>
+                  <a:srgbClr val="475569"/>
+                </a:solidFill>
+                <a:latin typeface="Calibri" pitchFamily="34" charset="0"/>
+                <a:ea typeface="Calibri" pitchFamily="34" charset="-122"/>
+                <a:cs typeface="Calibri" pitchFamily="34" charset="-120"/>
+              </a:rPr>
+              <a:t>past tense / done</a:t>
+            </a:r>
+            <a:endParaRPr lang="en-US" sz="850" dirty="0"/>
+          </a:p>
+        </p:txBody>
+      </p:sp>
+      <p:sp>
+        <p:nvSpPr>
+          <p:cNvPr id="28" name="Shape 26"/>
           <p:cNvSpPr/>
           <p:nvPr/>
         </p:nvSpPr>
@@ -8992,7 +9440,7 @@
       </p:sp>
       <p:sp>
         <p:nvSpPr>
-          <p:cNvPr id="23" name="Text 21"/>
+          <p:cNvPr id="29" name="Text 27"/>
           <p:cNvSpPr/>
           <p:nvPr/>
         </p:nvSpPr>
@@ -9031,7 +9479,7 @@
       </p:sp>
       <p:sp>
         <p:nvSpPr>
-          <p:cNvPr id="24" name="Shape 22"/>
+          <p:cNvPr id="30" name="Shape 28"/>
           <p:cNvSpPr/>
           <p:nvPr/>
         </p:nvSpPr>
@@ -9058,13 +9506,13 @@
       </p:sp>
       <p:sp>
         <p:nvSpPr>
-          <p:cNvPr id="25" name="Shape 23"/>
-          <p:cNvSpPr/>
-          <p:nvPr/>
-        </p:nvSpPr>
-        <p:spPr>
-          <a:xfrm>
-            <a:off x="2999232" y="3364992"/>
+          <p:cNvPr id="31" name="Shape 29"/>
+          <p:cNvSpPr/>
+          <p:nvPr/>
+        </p:nvSpPr>
+        <p:spPr>
+          <a:xfrm>
+            <a:off x="2313432" y="3364992"/>
             <a:ext cx="1645920" cy="475488"/>
           </a:xfrm>
           <a:prstGeom prst="rect">
@@ -9085,13 +9533,13 @@
       </p:sp>
       <p:sp>
         <p:nvSpPr>
-          <p:cNvPr id="26" name="Text 24"/>
-          <p:cNvSpPr/>
-          <p:nvPr/>
-        </p:nvSpPr>
-        <p:spPr>
-          <a:xfrm>
-            <a:off x="2999232" y="3364992"/>
+          <p:cNvPr id="32" name="Text 30"/>
+          <p:cNvSpPr/>
+          <p:nvPr/>
+        </p:nvSpPr>
+        <p:spPr>
+          <a:xfrm>
+            <a:off x="2313432" y="3364992"/>
             <a:ext cx="1645920" cy="475488"/>
           </a:xfrm>
           <a:prstGeom prst="rect">
@@ -9116,7 +9564,7 @@
                 <a:ea typeface="Trebuchet MS" pitchFamily="34" charset="-122"/>
                 <a:cs typeface="Trebuchet MS" pitchFamily="34" charset="-120"/>
               </a:rPr>
-              <a:t>sweet</a:t>
+              <a:t>un</a:t>
             </a:r>
             <a:endParaRPr lang="en-US" sz="1400" dirty="0"/>
           </a:p>
@@ -9124,14 +9572,14 @@
       </p:sp>
       <p:sp>
         <p:nvSpPr>
-          <p:cNvPr id="27" name="Text 25"/>
-          <p:cNvSpPr/>
-          <p:nvPr/>
-        </p:nvSpPr>
-        <p:spPr>
-          <a:xfrm>
-            <a:off x="4645152" y="3364992"/>
-            <a:ext cx="1097280" cy="475488"/>
+          <p:cNvPr id="33" name="Text 31"/>
+          <p:cNvSpPr/>
+          <p:nvPr/>
+        </p:nvSpPr>
+        <p:spPr>
+          <a:xfrm>
+            <a:off x="3959352" y="3364992"/>
+            <a:ext cx="411480" cy="475488"/>
           </a:xfrm>
           <a:prstGeom prst="rect">
             <a:avLst/>
@@ -9163,13 +9611,13 @@
       </p:sp>
       <p:sp>
         <p:nvSpPr>
-          <p:cNvPr id="28" name="Shape 26"/>
-          <p:cNvSpPr/>
-          <p:nvPr/>
-        </p:nvSpPr>
-        <p:spPr>
-          <a:xfrm>
-            <a:off x="5742432" y="3364992"/>
+          <p:cNvPr id="34" name="Shape 32"/>
+          <p:cNvSpPr/>
+          <p:nvPr/>
+        </p:nvSpPr>
+        <p:spPr>
+          <a:xfrm>
+            <a:off x="4370832" y="3364992"/>
             <a:ext cx="1645920" cy="475488"/>
           </a:xfrm>
           <a:prstGeom prst="rect">
@@ -9190,13 +9638,13 @@
       </p:sp>
       <p:sp>
         <p:nvSpPr>
-          <p:cNvPr id="29" name="Text 27"/>
-          <p:cNvSpPr/>
-          <p:nvPr/>
-        </p:nvSpPr>
-        <p:spPr>
-          <a:xfrm>
-            <a:off x="5742432" y="3364992"/>
+          <p:cNvPr id="35" name="Text 33"/>
+          <p:cNvSpPr/>
+          <p:nvPr/>
+        </p:nvSpPr>
+        <p:spPr>
+          <a:xfrm>
+            <a:off x="4370832" y="3364992"/>
             <a:ext cx="1645920" cy="475488"/>
           </a:xfrm>
           <a:prstGeom prst="rect">
@@ -9221,7 +9669,7 @@
                 <a:ea typeface="Trebuchet MS" pitchFamily="34" charset="-122"/>
                 <a:cs typeface="Trebuchet MS" pitchFamily="34" charset="-120"/>
               </a:rPr>
-              <a:t>ness</a:t>
+              <a:t>sweet</a:t>
             </a:r>
             <a:endParaRPr lang="en-US" sz="1400" dirty="0"/>
           </a:p>
@@ -9229,7 +9677,112 @@
       </p:sp>
       <p:sp>
         <p:nvSpPr>
-          <p:cNvPr id="30" name="Shape 28"/>
+          <p:cNvPr id="36" name="Text 34"/>
+          <p:cNvSpPr/>
+          <p:nvPr/>
+        </p:nvSpPr>
+        <p:spPr>
+          <a:xfrm>
+            <a:off x="6016752" y="3364992"/>
+            <a:ext cx="411480" cy="475488"/>
+          </a:xfrm>
+          <a:prstGeom prst="rect">
+            <a:avLst/>
+          </a:prstGeom>
+          <a:noFill/>
+          <a:ln/>
+        </p:spPr>
+        <p:txBody>
+          <a:bodyPr wrap="square" lIns="0" tIns="0" rIns="0" bIns="0" rtlCol="0" anchor="ctr"/>
+          <a:lstStyle/>
+          <a:p>
+            <a:pPr algn="ctr" indent="0" marL="0">
+              <a:buNone/>
+            </a:pPr>
+            <a:r>
+              <a:rPr lang="en-US" sz="1600" b="1" dirty="0">
+                <a:solidFill>
+                  <a:srgbClr val="0D9488"/>
+                </a:solidFill>
+                <a:latin typeface="Trebuchet MS" pitchFamily="34" charset="0"/>
+                <a:ea typeface="Trebuchet MS" pitchFamily="34" charset="-122"/>
+                <a:cs typeface="Trebuchet MS" pitchFamily="34" charset="-120"/>
+              </a:rPr>
+              <a:t>·</a:t>
+            </a:r>
+            <a:endParaRPr lang="en-US" sz="1600" dirty="0"/>
+          </a:p>
+        </p:txBody>
+      </p:sp>
+      <p:sp>
+        <p:nvSpPr>
+          <p:cNvPr id="37" name="Shape 35"/>
+          <p:cNvSpPr/>
+          <p:nvPr/>
+        </p:nvSpPr>
+        <p:spPr>
+          <a:xfrm>
+            <a:off x="6428232" y="3364992"/>
+            <a:ext cx="1645920" cy="475488"/>
+          </a:xfrm>
+          <a:prstGeom prst="rect">
+            <a:avLst>
+              <a:gd name="adj" fmla="val 9615"/>
+            </a:avLst>
+          </a:prstGeom>
+          <a:solidFill>
+            <a:srgbClr val="FFFFFF"/>
+          </a:solidFill>
+          <a:ln w="12700">
+            <a:solidFill>
+              <a:srgbClr val="0D9488"/>
+            </a:solidFill>
+            <a:prstDash val="solid"/>
+          </a:ln>
+        </p:spPr>
+      </p:sp>
+      <p:sp>
+        <p:nvSpPr>
+          <p:cNvPr id="38" name="Text 36"/>
+          <p:cNvSpPr/>
+          <p:nvPr/>
+        </p:nvSpPr>
+        <p:spPr>
+          <a:xfrm>
+            <a:off x="6428232" y="3364992"/>
+            <a:ext cx="1645920" cy="475488"/>
+          </a:xfrm>
+          <a:prstGeom prst="rect">
+            <a:avLst/>
+          </a:prstGeom>
+          <a:noFill/>
+          <a:ln/>
+        </p:spPr>
+        <p:txBody>
+          <a:bodyPr wrap="square" lIns="0" tIns="0" rIns="0" bIns="0" rtlCol="0" anchor="ctr"/>
+          <a:lstStyle/>
+          <a:p>
+            <a:pPr algn="ctr" indent="0" marL="0">
+              <a:buNone/>
+            </a:pPr>
+            <a:r>
+              <a:rPr lang="en-US" sz="1400" b="1" dirty="0">
+                <a:solidFill>
+                  <a:srgbClr val="0D9488"/>
+                </a:solidFill>
+                <a:latin typeface="Trebuchet MS" pitchFamily="34" charset="0"/>
+                <a:ea typeface="Trebuchet MS" pitchFamily="34" charset="-122"/>
+                <a:cs typeface="Trebuchet MS" pitchFamily="34" charset="-120"/>
+              </a:rPr>
+              <a:t>ened</a:t>
+            </a:r>
+            <a:endParaRPr lang="en-US" sz="1400" dirty="0"/>
+          </a:p>
+        </p:txBody>
+      </p:sp>
+      <p:sp>
+        <p:nvSpPr>
+          <p:cNvPr id="39" name="Shape 37"/>
           <p:cNvSpPr/>
           <p:nvPr/>
         </p:nvSpPr>
@@ -9256,7 +9809,7 @@
       </p:sp>
       <p:sp>
         <p:nvSpPr>
-          <p:cNvPr id="31" name="Text 29"/>
+          <p:cNvPr id="40" name="Text 38"/>
           <p:cNvSpPr/>
           <p:nvPr/>
         </p:nvSpPr>
@@ -9295,7 +9848,7 @@
       </p:sp>
       <p:sp>
         <p:nvSpPr>
-          <p:cNvPr id="32" name="Shape 30"/>
+          <p:cNvPr id="41" name="Shape 39"/>
           <p:cNvSpPr/>
           <p:nvPr/>
         </p:nvSpPr>
@@ -9322,7 +9875,7 @@
       </p:sp>
       <p:sp>
         <p:nvSpPr>
-          <p:cNvPr id="33" name="Text 31"/>
+          <p:cNvPr id="42" name="Text 40"/>
           <p:cNvSpPr/>
           <p:nvPr/>
         </p:nvSpPr>
@@ -9645,7 +10198,7 @@
                 <a:ea typeface="Calibri" pitchFamily="34" charset="-122"/>
                 <a:cs typeface="Calibri" pitchFamily="34" charset="-120"/>
               </a:rPr>
-              <a:t>Word Labs  •  wordlabs.app  •  Root: 'sweet' = having a pleasant sugary taste</a:t>
+              <a:t>Word Labs  •  wordlabs.app  •  Root: 'sweet' = pleasant sugary taste or smell</a:t>
             </a:r>
             <a:endParaRPr lang="en-US" sz="800" dirty="0"/>
           </a:p>
@@ -9784,7 +10337,7 @@
                 <a:ea typeface="Trebuchet MS" pitchFamily="34" charset="-122"/>
                 <a:cs typeface="Trebuchet MS" pitchFamily="34" charset="-120"/>
               </a:rPr>
-              <a:t>sweetness</a:t>
+              <a:t>unsweetened</a:t>
             </a:r>
             <a:endParaRPr lang="en-US" sz="2800" dirty="0"/>
           </a:p>
@@ -9864,8 +10417,8 @@
         </p:nvSpPr>
         <p:spPr>
           <a:xfrm>
-            <a:off x="2938272" y="2258568"/>
-            <a:ext cx="1828800" cy="292608"/>
+            <a:off x="1989734" y="2258568"/>
+            <a:ext cx="1581912" cy="292608"/>
           </a:xfrm>
           <a:prstGeom prst="rect">
             <a:avLst>
@@ -9873,11 +10426,11 @@
             </a:avLst>
           </a:prstGeom>
           <a:solidFill>
-            <a:srgbClr val="CCFBF1"/>
+            <a:srgbClr val="DDD6FE"/>
           </a:solidFill>
           <a:ln w="19050">
             <a:solidFill>
-              <a:srgbClr val="0D9488"/>
+              <a:srgbClr val="7C3AED"/>
             </a:solidFill>
             <a:prstDash val="solid"/>
           </a:ln>
@@ -9898,8 +10451,8 @@
         </p:nvSpPr>
         <p:spPr>
           <a:xfrm>
-            <a:off x="2938272" y="2258568"/>
-            <a:ext cx="1828800" cy="292608"/>
+            <a:off x="1989734" y="2258568"/>
+            <a:ext cx="1581912" cy="292608"/>
           </a:xfrm>
           <a:prstGeom prst="rect">
             <a:avLst/>
@@ -9917,13 +10470,13 @@
             <a:r>
               <a:rPr lang="en-US" sz="1300" b="1" dirty="0">
                 <a:solidFill>
-                  <a:srgbClr val="0F766E"/>
+                  <a:srgbClr val="4C1D95"/>
                 </a:solidFill>
                 <a:latin typeface="Trebuchet MS" pitchFamily="34" charset="0"/>
                 <a:ea typeface="Trebuchet MS" pitchFamily="34" charset="-122"/>
                 <a:cs typeface="Trebuchet MS" pitchFamily="34" charset="-120"/>
               </a:rPr>
-              <a:t>sweet</a:t>
+              <a:t>un</a:t>
             </a:r>
             <a:endParaRPr lang="en-US" sz="1300" dirty="0"/>
           </a:p>
@@ -9937,8 +10490,8 @@
         </p:nvSpPr>
         <p:spPr>
           <a:xfrm>
-            <a:off x="2938272" y="2569464"/>
-            <a:ext cx="1828800" cy="201168"/>
+            <a:off x="1989734" y="2569464"/>
+            <a:ext cx="1581912" cy="201168"/>
           </a:xfrm>
           <a:prstGeom prst="rect">
             <a:avLst/>
@@ -9962,7 +10515,7 @@
                 <a:ea typeface="Calibri" pitchFamily="34" charset="-122"/>
                 <a:cs typeface="Calibri" pitchFamily="34" charset="-120"/>
               </a:rPr>
-              <a:t>pleasant sugary taste</a:t>
+              <a:t>not</a:t>
             </a:r>
             <a:endParaRPr lang="en-US" sz="850" dirty="0"/>
           </a:p>
@@ -9976,8 +10529,8 @@
         </p:nvSpPr>
         <p:spPr>
           <a:xfrm>
-            <a:off x="5803392" y="2258568"/>
-            <a:ext cx="1828800" cy="292608"/>
+            <a:off x="3659429" y="2258568"/>
+            <a:ext cx="1581912" cy="292608"/>
           </a:xfrm>
           <a:prstGeom prst="rect">
             <a:avLst>
@@ -9985,11 +10538,11 @@
             </a:avLst>
           </a:prstGeom>
           <a:solidFill>
-            <a:srgbClr val="FCE7F3"/>
+            <a:srgbClr val="CCFBF1"/>
           </a:solidFill>
           <a:ln w="19050">
             <a:solidFill>
-              <a:srgbClr val="DB2777"/>
+              <a:srgbClr val="0D9488"/>
             </a:solidFill>
             <a:prstDash val="solid"/>
           </a:ln>
@@ -10010,8 +10563,8 @@
         </p:nvSpPr>
         <p:spPr>
           <a:xfrm>
-            <a:off x="5803392" y="2258568"/>
-            <a:ext cx="1828800" cy="292608"/>
+            <a:off x="3659429" y="2258568"/>
+            <a:ext cx="1581912" cy="292608"/>
           </a:xfrm>
           <a:prstGeom prst="rect">
             <a:avLst/>
@@ -10029,13 +10582,13 @@
             <a:r>
               <a:rPr lang="en-US" sz="1300" b="1" dirty="0">
                 <a:solidFill>
-                  <a:srgbClr val="9D174D"/>
+                  <a:srgbClr val="0F766E"/>
                 </a:solidFill>
                 <a:latin typeface="Trebuchet MS" pitchFamily="34" charset="0"/>
                 <a:ea typeface="Trebuchet MS" pitchFamily="34" charset="-122"/>
                 <a:cs typeface="Trebuchet MS" pitchFamily="34" charset="-120"/>
               </a:rPr>
-              <a:t>ness</a:t>
+              <a:t>sweet</a:t>
             </a:r>
             <a:endParaRPr lang="en-US" sz="1300" dirty="0"/>
           </a:p>
@@ -10049,8 +10602,8 @@
         </p:nvSpPr>
         <p:spPr>
           <a:xfrm>
-            <a:off x="5803392" y="2569464"/>
-            <a:ext cx="1828800" cy="201168"/>
+            <a:off x="3659429" y="2569464"/>
+            <a:ext cx="1581912" cy="201168"/>
           </a:xfrm>
           <a:prstGeom prst="rect">
             <a:avLst/>
@@ -10074,7 +10627,7 @@
                 <a:ea typeface="Calibri" pitchFamily="34" charset="-122"/>
                 <a:cs typeface="Calibri" pitchFamily="34" charset="-120"/>
               </a:rPr>
-              <a:t>quality or state of</a:t>
+              <a:t>pleasant sugary taste</a:t>
             </a:r>
             <a:endParaRPr lang="en-US" sz="850" dirty="0"/>
           </a:p>
@@ -10083,6 +10636,230 @@
       <p:sp>
         <p:nvSpPr>
           <p:cNvPr id="22" name="Shape 20"/>
+          <p:cNvSpPr/>
+          <p:nvPr/>
+        </p:nvSpPr>
+        <p:spPr>
+          <a:xfrm>
+            <a:off x="5329123" y="2258568"/>
+            <a:ext cx="1581912" cy="292608"/>
+          </a:xfrm>
+          <a:prstGeom prst="rect">
+            <a:avLst>
+              <a:gd name="adj" fmla="val 25000"/>
+            </a:avLst>
+          </a:prstGeom>
+          <a:solidFill>
+            <a:srgbClr val="FCE7F3"/>
+          </a:solidFill>
+          <a:ln w="19050">
+            <a:solidFill>
+              <a:srgbClr val="DB2777"/>
+            </a:solidFill>
+            <a:prstDash val="solid"/>
+          </a:ln>
+          <a:effectLst>
+            <a:outerShdw sx="100000" sy="100000" kx="0" ky="0" algn="bl" rotWithShape="0" blurRad="101600" dist="38100" dir="8100000">
+              <a:srgbClr val="000000">
+                <a:alpha val="12000"/>
+              </a:srgbClr>
+            </a:outerShdw>
+          </a:effectLst>
+        </p:spPr>
+      </p:sp>
+      <p:sp>
+        <p:nvSpPr>
+          <p:cNvPr id="23" name="Text 21"/>
+          <p:cNvSpPr/>
+          <p:nvPr/>
+        </p:nvSpPr>
+        <p:spPr>
+          <a:xfrm>
+            <a:off x="5329123" y="2258568"/>
+            <a:ext cx="1581912" cy="292608"/>
+          </a:xfrm>
+          <a:prstGeom prst="rect">
+            <a:avLst/>
+          </a:prstGeom>
+          <a:noFill/>
+          <a:ln/>
+        </p:spPr>
+        <p:txBody>
+          <a:bodyPr wrap="square" lIns="0" tIns="0" rIns="0" bIns="0" rtlCol="0" anchor="ctr"/>
+          <a:lstStyle/>
+          <a:p>
+            <a:pPr algn="ctr" indent="0" marL="0">
+              <a:buNone/>
+            </a:pPr>
+            <a:r>
+              <a:rPr lang="en-US" sz="1300" b="1" dirty="0">
+                <a:solidFill>
+                  <a:srgbClr val="9D174D"/>
+                </a:solidFill>
+                <a:latin typeface="Trebuchet MS" pitchFamily="34" charset="0"/>
+                <a:ea typeface="Trebuchet MS" pitchFamily="34" charset="-122"/>
+                <a:cs typeface="Trebuchet MS" pitchFamily="34" charset="-120"/>
+              </a:rPr>
+              <a:t>en</a:t>
+            </a:r>
+            <a:endParaRPr lang="en-US" sz="1300" dirty="0"/>
+          </a:p>
+        </p:txBody>
+      </p:sp>
+      <p:sp>
+        <p:nvSpPr>
+          <p:cNvPr id="24" name="Text 22"/>
+          <p:cNvSpPr/>
+          <p:nvPr/>
+        </p:nvSpPr>
+        <p:spPr>
+          <a:xfrm>
+            <a:off x="5329123" y="2569464"/>
+            <a:ext cx="1581912" cy="201168"/>
+          </a:xfrm>
+          <a:prstGeom prst="rect">
+            <a:avLst/>
+          </a:prstGeom>
+          <a:noFill/>
+          <a:ln/>
+        </p:spPr>
+        <p:txBody>
+          <a:bodyPr wrap="square" lIns="0" tIns="0" rIns="0" bIns="0" rtlCol="0" anchor="t"/>
+          <a:lstStyle/>
+          <a:p>
+            <a:pPr algn="ctr" indent="0" marL="0">
+              <a:buNone/>
+            </a:pPr>
+            <a:r>
+              <a:rPr lang="en-US" sz="850" dirty="0">
+                <a:solidFill>
+                  <a:srgbClr val="475569"/>
+                </a:solidFill>
+                <a:latin typeface="Calibri" pitchFamily="34" charset="0"/>
+                <a:ea typeface="Calibri" pitchFamily="34" charset="-122"/>
+                <a:cs typeface="Calibri" pitchFamily="34" charset="-120"/>
+              </a:rPr>
+              <a:t>to make</a:t>
+            </a:r>
+            <a:endParaRPr lang="en-US" sz="850" dirty="0"/>
+          </a:p>
+        </p:txBody>
+      </p:sp>
+      <p:sp>
+        <p:nvSpPr>
+          <p:cNvPr id="25" name="Shape 23"/>
+          <p:cNvSpPr/>
+          <p:nvPr/>
+        </p:nvSpPr>
+        <p:spPr>
+          <a:xfrm>
+            <a:off x="6998818" y="2258568"/>
+            <a:ext cx="1581912" cy="292608"/>
+          </a:xfrm>
+          <a:prstGeom prst="rect">
+            <a:avLst>
+              <a:gd name="adj" fmla="val 25000"/>
+            </a:avLst>
+          </a:prstGeom>
+          <a:solidFill>
+            <a:srgbClr val="FCE7F3"/>
+          </a:solidFill>
+          <a:ln w="19050">
+            <a:solidFill>
+              <a:srgbClr val="DB2777"/>
+            </a:solidFill>
+            <a:prstDash val="solid"/>
+          </a:ln>
+          <a:effectLst>
+            <a:outerShdw sx="100000" sy="100000" kx="0" ky="0" algn="bl" rotWithShape="0" blurRad="101600" dist="38100" dir="8100000">
+              <a:srgbClr val="000000">
+                <a:alpha val="12000"/>
+              </a:srgbClr>
+            </a:outerShdw>
+          </a:effectLst>
+        </p:spPr>
+      </p:sp>
+      <p:sp>
+        <p:nvSpPr>
+          <p:cNvPr id="26" name="Text 24"/>
+          <p:cNvSpPr/>
+          <p:nvPr/>
+        </p:nvSpPr>
+        <p:spPr>
+          <a:xfrm>
+            <a:off x="6998818" y="2258568"/>
+            <a:ext cx="1581912" cy="292608"/>
+          </a:xfrm>
+          <a:prstGeom prst="rect">
+            <a:avLst/>
+          </a:prstGeom>
+          <a:noFill/>
+          <a:ln/>
+        </p:spPr>
+        <p:txBody>
+          <a:bodyPr wrap="square" lIns="0" tIns="0" rIns="0" bIns="0" rtlCol="0" anchor="ctr"/>
+          <a:lstStyle/>
+          <a:p>
+            <a:pPr algn="ctr" indent="0" marL="0">
+              <a:buNone/>
+            </a:pPr>
+            <a:r>
+              <a:rPr lang="en-US" sz="1300" b="1" dirty="0">
+                <a:solidFill>
+                  <a:srgbClr val="9D174D"/>
+                </a:solidFill>
+                <a:latin typeface="Trebuchet MS" pitchFamily="34" charset="0"/>
+                <a:ea typeface="Trebuchet MS" pitchFamily="34" charset="-122"/>
+                <a:cs typeface="Trebuchet MS" pitchFamily="34" charset="-120"/>
+              </a:rPr>
+              <a:t>ed</a:t>
+            </a:r>
+            <a:endParaRPr lang="en-US" sz="1300" dirty="0"/>
+          </a:p>
+        </p:txBody>
+      </p:sp>
+      <p:sp>
+        <p:nvSpPr>
+          <p:cNvPr id="27" name="Text 25"/>
+          <p:cNvSpPr/>
+          <p:nvPr/>
+        </p:nvSpPr>
+        <p:spPr>
+          <a:xfrm>
+            <a:off x="6998818" y="2569464"/>
+            <a:ext cx="1581912" cy="201168"/>
+          </a:xfrm>
+          <a:prstGeom prst="rect">
+            <a:avLst/>
+          </a:prstGeom>
+          <a:noFill/>
+          <a:ln/>
+        </p:spPr>
+        <p:txBody>
+          <a:bodyPr wrap="square" lIns="0" tIns="0" rIns="0" bIns="0" rtlCol="0" anchor="t"/>
+          <a:lstStyle/>
+          <a:p>
+            <a:pPr algn="ctr" indent="0" marL="0">
+              <a:buNone/>
+            </a:pPr>
+            <a:r>
+              <a:rPr lang="en-US" sz="850" dirty="0">
+                <a:solidFill>
+                  <a:srgbClr val="475569"/>
+                </a:solidFill>
+                <a:latin typeface="Calibri" pitchFamily="34" charset="0"/>
+                <a:ea typeface="Calibri" pitchFamily="34" charset="-122"/>
+                <a:cs typeface="Calibri" pitchFamily="34" charset="-120"/>
+              </a:rPr>
+              <a:t>past tense / done</a:t>
+            </a:r>
+            <a:endParaRPr lang="en-US" sz="850" dirty="0"/>
+          </a:p>
+        </p:txBody>
+      </p:sp>
+      <p:sp>
+        <p:nvSpPr>
+          <p:cNvPr id="28" name="Shape 26"/>
           <p:cNvSpPr/>
           <p:nvPr/>
         </p:nvSpPr>
@@ -10109,7 +10886,7 @@
       </p:sp>
       <p:sp>
         <p:nvSpPr>
-          <p:cNvPr id="23" name="Text 21"/>
+          <p:cNvPr id="29" name="Text 27"/>
           <p:cNvSpPr/>
           <p:nvPr/>
         </p:nvSpPr>
@@ -10148,7 +10925,7 @@
       </p:sp>
       <p:sp>
         <p:nvSpPr>
-          <p:cNvPr id="24" name="Shape 22"/>
+          <p:cNvPr id="30" name="Shape 28"/>
           <p:cNvSpPr/>
           <p:nvPr/>
         </p:nvSpPr>
@@ -10175,13 +10952,13 @@
       </p:sp>
       <p:sp>
         <p:nvSpPr>
-          <p:cNvPr id="25" name="Shape 23"/>
-          <p:cNvSpPr/>
-          <p:nvPr/>
-        </p:nvSpPr>
-        <p:spPr>
-          <a:xfrm>
-            <a:off x="2999232" y="3364992"/>
+          <p:cNvPr id="31" name="Shape 29"/>
+          <p:cNvSpPr/>
+          <p:nvPr/>
+        </p:nvSpPr>
+        <p:spPr>
+          <a:xfrm>
+            <a:off x="2313432" y="3364992"/>
             <a:ext cx="1645920" cy="475488"/>
           </a:xfrm>
           <a:prstGeom prst="rect">
@@ -10202,13 +10979,13 @@
       </p:sp>
       <p:sp>
         <p:nvSpPr>
-          <p:cNvPr id="26" name="Text 24"/>
-          <p:cNvSpPr/>
-          <p:nvPr/>
-        </p:nvSpPr>
-        <p:spPr>
-          <a:xfrm>
-            <a:off x="2999232" y="3364992"/>
+          <p:cNvPr id="32" name="Text 30"/>
+          <p:cNvSpPr/>
+          <p:nvPr/>
+        </p:nvSpPr>
+        <p:spPr>
+          <a:xfrm>
+            <a:off x="2313432" y="3364992"/>
             <a:ext cx="1645920" cy="475488"/>
           </a:xfrm>
           <a:prstGeom prst="rect">
@@ -10233,7 +11010,7 @@
                 <a:ea typeface="Trebuchet MS" pitchFamily="34" charset="-122"/>
                 <a:cs typeface="Trebuchet MS" pitchFamily="34" charset="-120"/>
               </a:rPr>
-              <a:t>sweet</a:t>
+              <a:t>un</a:t>
             </a:r>
             <a:endParaRPr lang="en-US" sz="1400" dirty="0"/>
           </a:p>
@@ -10241,14 +11018,14 @@
       </p:sp>
       <p:sp>
         <p:nvSpPr>
-          <p:cNvPr id="27" name="Text 25"/>
-          <p:cNvSpPr/>
-          <p:nvPr/>
-        </p:nvSpPr>
-        <p:spPr>
-          <a:xfrm>
-            <a:off x="4645152" y="3364992"/>
-            <a:ext cx="1097280" cy="475488"/>
+          <p:cNvPr id="33" name="Text 31"/>
+          <p:cNvSpPr/>
+          <p:nvPr/>
+        </p:nvSpPr>
+        <p:spPr>
+          <a:xfrm>
+            <a:off x="3959352" y="3364992"/>
+            <a:ext cx="411480" cy="475488"/>
           </a:xfrm>
           <a:prstGeom prst="rect">
             <a:avLst/>
@@ -10280,13 +11057,13 @@
       </p:sp>
       <p:sp>
         <p:nvSpPr>
-          <p:cNvPr id="28" name="Shape 26"/>
-          <p:cNvSpPr/>
-          <p:nvPr/>
-        </p:nvSpPr>
-        <p:spPr>
-          <a:xfrm>
-            <a:off x="5742432" y="3364992"/>
+          <p:cNvPr id="34" name="Shape 32"/>
+          <p:cNvSpPr/>
+          <p:nvPr/>
+        </p:nvSpPr>
+        <p:spPr>
+          <a:xfrm>
+            <a:off x="4370832" y="3364992"/>
             <a:ext cx="1645920" cy="475488"/>
           </a:xfrm>
           <a:prstGeom prst="rect">
@@ -10307,13 +11084,13 @@
       </p:sp>
       <p:sp>
         <p:nvSpPr>
-          <p:cNvPr id="29" name="Text 27"/>
-          <p:cNvSpPr/>
-          <p:nvPr/>
-        </p:nvSpPr>
-        <p:spPr>
-          <a:xfrm>
-            <a:off x="5742432" y="3364992"/>
+          <p:cNvPr id="35" name="Text 33"/>
+          <p:cNvSpPr/>
+          <p:nvPr/>
+        </p:nvSpPr>
+        <p:spPr>
+          <a:xfrm>
+            <a:off x="4370832" y="3364992"/>
             <a:ext cx="1645920" cy="475488"/>
           </a:xfrm>
           <a:prstGeom prst="rect">
@@ -10338,7 +11115,7 @@
                 <a:ea typeface="Trebuchet MS" pitchFamily="34" charset="-122"/>
                 <a:cs typeface="Trebuchet MS" pitchFamily="34" charset="-120"/>
               </a:rPr>
-              <a:t>ness</a:t>
+              <a:t>sweet</a:t>
             </a:r>
             <a:endParaRPr lang="en-US" sz="1400" dirty="0"/>
           </a:p>
@@ -10346,7 +11123,112 @@
       </p:sp>
       <p:sp>
         <p:nvSpPr>
-          <p:cNvPr id="30" name="Shape 28"/>
+          <p:cNvPr id="36" name="Text 34"/>
+          <p:cNvSpPr/>
+          <p:nvPr/>
+        </p:nvSpPr>
+        <p:spPr>
+          <a:xfrm>
+            <a:off x="6016752" y="3364992"/>
+            <a:ext cx="411480" cy="475488"/>
+          </a:xfrm>
+          <a:prstGeom prst="rect">
+            <a:avLst/>
+          </a:prstGeom>
+          <a:noFill/>
+          <a:ln/>
+        </p:spPr>
+        <p:txBody>
+          <a:bodyPr wrap="square" lIns="0" tIns="0" rIns="0" bIns="0" rtlCol="0" anchor="ctr"/>
+          <a:lstStyle/>
+          <a:p>
+            <a:pPr algn="ctr" indent="0" marL="0">
+              <a:buNone/>
+            </a:pPr>
+            <a:r>
+              <a:rPr lang="en-US" sz="1600" b="1" dirty="0">
+                <a:solidFill>
+                  <a:srgbClr val="0D9488"/>
+                </a:solidFill>
+                <a:latin typeface="Trebuchet MS" pitchFamily="34" charset="0"/>
+                <a:ea typeface="Trebuchet MS" pitchFamily="34" charset="-122"/>
+                <a:cs typeface="Trebuchet MS" pitchFamily="34" charset="-120"/>
+              </a:rPr>
+              <a:t>·</a:t>
+            </a:r>
+            <a:endParaRPr lang="en-US" sz="1600" dirty="0"/>
+          </a:p>
+        </p:txBody>
+      </p:sp>
+      <p:sp>
+        <p:nvSpPr>
+          <p:cNvPr id="37" name="Shape 35"/>
+          <p:cNvSpPr/>
+          <p:nvPr/>
+        </p:nvSpPr>
+        <p:spPr>
+          <a:xfrm>
+            <a:off x="6428232" y="3364992"/>
+            <a:ext cx="1645920" cy="475488"/>
+          </a:xfrm>
+          <a:prstGeom prst="rect">
+            <a:avLst>
+              <a:gd name="adj" fmla="val 9615"/>
+            </a:avLst>
+          </a:prstGeom>
+          <a:solidFill>
+            <a:srgbClr val="FFFFFF"/>
+          </a:solidFill>
+          <a:ln w="12700">
+            <a:solidFill>
+              <a:srgbClr val="0D9488"/>
+            </a:solidFill>
+            <a:prstDash val="solid"/>
+          </a:ln>
+        </p:spPr>
+      </p:sp>
+      <p:sp>
+        <p:nvSpPr>
+          <p:cNvPr id="38" name="Text 36"/>
+          <p:cNvSpPr/>
+          <p:nvPr/>
+        </p:nvSpPr>
+        <p:spPr>
+          <a:xfrm>
+            <a:off x="6428232" y="3364992"/>
+            <a:ext cx="1645920" cy="475488"/>
+          </a:xfrm>
+          <a:prstGeom prst="rect">
+            <a:avLst/>
+          </a:prstGeom>
+          <a:noFill/>
+          <a:ln/>
+        </p:spPr>
+        <p:txBody>
+          <a:bodyPr wrap="square" lIns="0" tIns="0" rIns="0" bIns="0" rtlCol="0" anchor="ctr"/>
+          <a:lstStyle/>
+          <a:p>
+            <a:pPr algn="ctr" indent="0" marL="0">
+              <a:buNone/>
+            </a:pPr>
+            <a:r>
+              <a:rPr lang="en-US" sz="1400" b="1" dirty="0">
+                <a:solidFill>
+                  <a:srgbClr val="0D9488"/>
+                </a:solidFill>
+                <a:latin typeface="Trebuchet MS" pitchFamily="34" charset="0"/>
+                <a:ea typeface="Trebuchet MS" pitchFamily="34" charset="-122"/>
+                <a:cs typeface="Trebuchet MS" pitchFamily="34" charset="-120"/>
+              </a:rPr>
+              <a:t>ened</a:t>
+            </a:r>
+            <a:endParaRPr lang="en-US" sz="1400" dirty="0"/>
+          </a:p>
+        </p:txBody>
+      </p:sp>
+      <p:sp>
+        <p:nvSpPr>
+          <p:cNvPr id="39" name="Shape 37"/>
           <p:cNvSpPr/>
           <p:nvPr/>
         </p:nvSpPr>
@@ -10373,7 +11255,7 @@
       </p:sp>
       <p:sp>
         <p:nvSpPr>
-          <p:cNvPr id="31" name="Text 29"/>
+          <p:cNvPr id="40" name="Text 38"/>
           <p:cNvSpPr/>
           <p:nvPr/>
         </p:nvSpPr>
@@ -10412,7 +11294,7 @@
       </p:sp>
       <p:sp>
         <p:nvSpPr>
-          <p:cNvPr id="32" name="Shape 30"/>
+          <p:cNvPr id="41" name="Shape 39"/>
           <p:cNvSpPr/>
           <p:nvPr/>
         </p:nvSpPr>
@@ -10439,14 +11321,14 @@
       </p:sp>
       <p:sp>
         <p:nvSpPr>
-          <p:cNvPr id="33" name="Shape 31"/>
-          <p:cNvSpPr/>
-          <p:nvPr/>
-        </p:nvSpPr>
-        <p:spPr>
-          <a:xfrm>
-            <a:off x="2254649" y="4169664"/>
-            <a:ext cx="685800" cy="475488"/>
+          <p:cNvPr id="42" name="Shape 40"/>
+          <p:cNvSpPr/>
+          <p:nvPr/>
+        </p:nvSpPr>
+        <p:spPr>
+          <a:xfrm>
+            <a:off x="1951330" y="4169664"/>
+            <a:ext cx="676656" cy="475488"/>
           </a:xfrm>
           <a:prstGeom prst="rect">
             <a:avLst>
@@ -10466,14 +11348,14 @@
       </p:sp>
       <p:sp>
         <p:nvSpPr>
-          <p:cNvPr id="34" name="Text 32"/>
-          <p:cNvSpPr/>
-          <p:nvPr/>
-        </p:nvSpPr>
-        <p:spPr>
-          <a:xfrm>
-            <a:off x="2254649" y="4169664"/>
-            <a:ext cx="685800" cy="475488"/>
+          <p:cNvPr id="43" name="Text 41"/>
+          <p:cNvSpPr/>
+          <p:nvPr/>
+        </p:nvSpPr>
+        <p:spPr>
+          <a:xfrm>
+            <a:off x="1951330" y="4169664"/>
+            <a:ext cx="676656" cy="475488"/>
           </a:xfrm>
           <a:prstGeom prst="rect">
             <a:avLst/>
@@ -10497,7 +11379,7 @@
                 <a:ea typeface="Trebuchet MS" pitchFamily="34" charset="-122"/>
                 <a:cs typeface="Trebuchet MS" pitchFamily="34" charset="-120"/>
               </a:rPr>
-              <a:t>sw</a:t>
+              <a:t>u</a:t>
             </a:r>
             <a:endParaRPr lang="en-US" sz="900" dirty="0"/>
           </a:p>
@@ -10505,14 +11387,14 @@
       </p:sp>
       <p:sp>
         <p:nvSpPr>
-          <p:cNvPr id="35" name="Shape 33"/>
-          <p:cNvSpPr/>
-          <p:nvPr/>
-        </p:nvSpPr>
-        <p:spPr>
-          <a:xfrm>
-            <a:off x="3293146" y="4169664"/>
-            <a:ext cx="685800" cy="475488"/>
+          <p:cNvPr id="44" name="Shape 42"/>
+          <p:cNvSpPr/>
+          <p:nvPr/>
+        </p:nvSpPr>
+        <p:spPr>
+          <a:xfrm>
+            <a:off x="2677363" y="4169664"/>
+            <a:ext cx="676656" cy="475488"/>
           </a:xfrm>
           <a:prstGeom prst="rect">
             <a:avLst>
@@ -10532,14 +11414,14 @@
       </p:sp>
       <p:sp>
         <p:nvSpPr>
-          <p:cNvPr id="36" name="Text 34"/>
-          <p:cNvSpPr/>
-          <p:nvPr/>
-        </p:nvSpPr>
-        <p:spPr>
-          <a:xfrm>
-            <a:off x="3293146" y="4169664"/>
-            <a:ext cx="685800" cy="475488"/>
+          <p:cNvPr id="45" name="Text 43"/>
+          <p:cNvSpPr/>
+          <p:nvPr/>
+        </p:nvSpPr>
+        <p:spPr>
+          <a:xfrm>
+            <a:off x="2677363" y="4169664"/>
+            <a:ext cx="676656" cy="475488"/>
           </a:xfrm>
           <a:prstGeom prst="rect">
             <a:avLst/>
@@ -10563,7 +11445,7 @@
                 <a:ea typeface="Trebuchet MS" pitchFamily="34" charset="-122"/>
                 <a:cs typeface="Trebuchet MS" pitchFamily="34" charset="-120"/>
               </a:rPr>
-              <a:t>ee</a:t>
+              <a:t>n</a:t>
             </a:r>
             <a:endParaRPr lang="en-US" sz="900" dirty="0"/>
           </a:p>
@@ -10571,14 +11453,14 @@
       </p:sp>
       <p:sp>
         <p:nvSpPr>
-          <p:cNvPr id="37" name="Shape 35"/>
-          <p:cNvSpPr/>
-          <p:nvPr/>
-        </p:nvSpPr>
-        <p:spPr>
-          <a:xfrm>
-            <a:off x="4331643" y="4169664"/>
-            <a:ext cx="685800" cy="475488"/>
+          <p:cNvPr id="46" name="Shape 44"/>
+          <p:cNvSpPr/>
+          <p:nvPr/>
+        </p:nvSpPr>
+        <p:spPr>
+          <a:xfrm>
+            <a:off x="3403397" y="4169664"/>
+            <a:ext cx="676656" cy="475488"/>
           </a:xfrm>
           <a:prstGeom prst="rect">
             <a:avLst>
@@ -10598,14 +11480,14 @@
       </p:sp>
       <p:sp>
         <p:nvSpPr>
-          <p:cNvPr id="38" name="Text 36"/>
-          <p:cNvSpPr/>
-          <p:nvPr/>
-        </p:nvSpPr>
-        <p:spPr>
-          <a:xfrm>
-            <a:off x="4331643" y="4169664"/>
-            <a:ext cx="685800" cy="475488"/>
+          <p:cNvPr id="47" name="Text 45"/>
+          <p:cNvSpPr/>
+          <p:nvPr/>
+        </p:nvSpPr>
+        <p:spPr>
+          <a:xfrm>
+            <a:off x="3403397" y="4169664"/>
+            <a:ext cx="676656" cy="475488"/>
           </a:xfrm>
           <a:prstGeom prst="rect">
             <a:avLst/>
@@ -10629,7 +11511,7 @@
                 <a:ea typeface="Trebuchet MS" pitchFamily="34" charset="-122"/>
                 <a:cs typeface="Trebuchet MS" pitchFamily="34" charset="-120"/>
               </a:rPr>
-              <a:t>t</a:t>
+              <a:t>sw</a:t>
             </a:r>
             <a:endParaRPr lang="en-US" sz="900" dirty="0"/>
           </a:p>
@@ -10637,14 +11519,14 @@
       </p:sp>
       <p:sp>
         <p:nvSpPr>
-          <p:cNvPr id="39" name="Shape 37"/>
-          <p:cNvSpPr/>
-          <p:nvPr/>
-        </p:nvSpPr>
-        <p:spPr>
-          <a:xfrm>
-            <a:off x="5370141" y="4169664"/>
-            <a:ext cx="685800" cy="475488"/>
+          <p:cNvPr id="48" name="Shape 46"/>
+          <p:cNvSpPr/>
+          <p:nvPr/>
+        </p:nvSpPr>
+        <p:spPr>
+          <a:xfrm>
+            <a:off x="4129430" y="4169664"/>
+            <a:ext cx="676656" cy="475488"/>
           </a:xfrm>
           <a:prstGeom prst="rect">
             <a:avLst>
@@ -10664,14 +11546,14 @@
       </p:sp>
       <p:sp>
         <p:nvSpPr>
-          <p:cNvPr id="40" name="Text 38"/>
-          <p:cNvSpPr/>
-          <p:nvPr/>
-        </p:nvSpPr>
-        <p:spPr>
-          <a:xfrm>
-            <a:off x="5370141" y="4169664"/>
-            <a:ext cx="685800" cy="475488"/>
+          <p:cNvPr id="49" name="Text 47"/>
+          <p:cNvSpPr/>
+          <p:nvPr/>
+        </p:nvSpPr>
+        <p:spPr>
+          <a:xfrm>
+            <a:off x="4129430" y="4169664"/>
+            <a:ext cx="676656" cy="475488"/>
           </a:xfrm>
           <a:prstGeom prst="rect">
             <a:avLst/>
@@ -10695,7 +11577,7 @@
                 <a:ea typeface="Trebuchet MS" pitchFamily="34" charset="-122"/>
                 <a:cs typeface="Trebuchet MS" pitchFamily="34" charset="-120"/>
               </a:rPr>
-              <a:t>n</a:t>
+              <a:t>ee</a:t>
             </a:r>
             <a:endParaRPr lang="en-US" sz="900" dirty="0"/>
           </a:p>
@@ -10703,14 +11585,14 @@
       </p:sp>
       <p:sp>
         <p:nvSpPr>
-          <p:cNvPr id="41" name="Shape 39"/>
-          <p:cNvSpPr/>
-          <p:nvPr/>
-        </p:nvSpPr>
-        <p:spPr>
-          <a:xfrm>
-            <a:off x="6408638" y="4169664"/>
-            <a:ext cx="685800" cy="475488"/>
+          <p:cNvPr id="50" name="Shape 48"/>
+          <p:cNvSpPr/>
+          <p:nvPr/>
+        </p:nvSpPr>
+        <p:spPr>
+          <a:xfrm>
+            <a:off x="4855464" y="4169664"/>
+            <a:ext cx="676656" cy="475488"/>
           </a:xfrm>
           <a:prstGeom prst="rect">
             <a:avLst>
@@ -10730,14 +11612,14 @@
       </p:sp>
       <p:sp>
         <p:nvSpPr>
-          <p:cNvPr id="42" name="Text 40"/>
-          <p:cNvSpPr/>
-          <p:nvPr/>
-        </p:nvSpPr>
-        <p:spPr>
-          <a:xfrm>
-            <a:off x="6408638" y="4169664"/>
-            <a:ext cx="685800" cy="475488"/>
+          <p:cNvPr id="51" name="Text 49"/>
+          <p:cNvSpPr/>
+          <p:nvPr/>
+        </p:nvSpPr>
+        <p:spPr>
+          <a:xfrm>
+            <a:off x="4855464" y="4169664"/>
+            <a:ext cx="676656" cy="475488"/>
           </a:xfrm>
           <a:prstGeom prst="rect">
             <a:avLst/>
@@ -10761,7 +11643,7 @@
                 <a:ea typeface="Trebuchet MS" pitchFamily="34" charset="-122"/>
                 <a:cs typeface="Trebuchet MS" pitchFamily="34" charset="-120"/>
               </a:rPr>
-              <a:t>e</a:t>
+              <a:t>t</a:t>
             </a:r>
             <a:endParaRPr lang="en-US" sz="900" dirty="0"/>
           </a:p>
@@ -10769,14 +11651,14 @@
       </p:sp>
       <p:sp>
         <p:nvSpPr>
-          <p:cNvPr id="43" name="Shape 41"/>
-          <p:cNvSpPr/>
-          <p:nvPr/>
-        </p:nvSpPr>
-        <p:spPr>
-          <a:xfrm>
-            <a:off x="7447135" y="4169664"/>
-            <a:ext cx="685800" cy="475488"/>
+          <p:cNvPr id="52" name="Shape 50"/>
+          <p:cNvSpPr/>
+          <p:nvPr/>
+        </p:nvSpPr>
+        <p:spPr>
+          <a:xfrm>
+            <a:off x="5581498" y="4169664"/>
+            <a:ext cx="676656" cy="475488"/>
           </a:xfrm>
           <a:prstGeom prst="rect">
             <a:avLst>
@@ -10796,14 +11678,14 @@
       </p:sp>
       <p:sp>
         <p:nvSpPr>
-          <p:cNvPr id="44" name="Text 42"/>
-          <p:cNvSpPr/>
-          <p:nvPr/>
-        </p:nvSpPr>
-        <p:spPr>
-          <a:xfrm>
-            <a:off x="7447135" y="4169664"/>
-            <a:ext cx="685800" cy="475488"/>
+          <p:cNvPr id="53" name="Text 51"/>
+          <p:cNvSpPr/>
+          <p:nvPr/>
+        </p:nvSpPr>
+        <p:spPr>
+          <a:xfrm>
+            <a:off x="5581498" y="4169664"/>
+            <a:ext cx="676656" cy="475488"/>
           </a:xfrm>
           <a:prstGeom prst="rect">
             <a:avLst/>
@@ -10827,7 +11709,205 @@
                 <a:ea typeface="Trebuchet MS" pitchFamily="34" charset="-122"/>
                 <a:cs typeface="Trebuchet MS" pitchFamily="34" charset="-120"/>
               </a:rPr>
-              <a:t>ss</a:t>
+              <a:t>e</a:t>
+            </a:r>
+            <a:endParaRPr lang="en-US" sz="900" dirty="0"/>
+          </a:p>
+        </p:txBody>
+      </p:sp>
+      <p:sp>
+        <p:nvSpPr>
+          <p:cNvPr id="54" name="Shape 52"/>
+          <p:cNvSpPr/>
+          <p:nvPr/>
+        </p:nvSpPr>
+        <p:spPr>
+          <a:xfrm>
+            <a:off x="6307531" y="4169664"/>
+            <a:ext cx="676656" cy="475488"/>
+          </a:xfrm>
+          <a:prstGeom prst="rect">
+            <a:avLst>
+              <a:gd name="adj" fmla="val 7692"/>
+            </a:avLst>
+          </a:prstGeom>
+          <a:solidFill>
+            <a:srgbClr val="FFFFFF"/>
+          </a:solidFill>
+          <a:ln w="12700">
+            <a:solidFill>
+              <a:srgbClr val="DB2777"/>
+            </a:solidFill>
+            <a:prstDash val="solid"/>
+          </a:ln>
+        </p:spPr>
+      </p:sp>
+      <p:sp>
+        <p:nvSpPr>
+          <p:cNvPr id="55" name="Text 53"/>
+          <p:cNvSpPr/>
+          <p:nvPr/>
+        </p:nvSpPr>
+        <p:spPr>
+          <a:xfrm>
+            <a:off x="6307531" y="4169664"/>
+            <a:ext cx="676656" cy="475488"/>
+          </a:xfrm>
+          <a:prstGeom prst="rect">
+            <a:avLst/>
+          </a:prstGeom>
+          <a:noFill/>
+          <a:ln/>
+        </p:spPr>
+        <p:txBody>
+          <a:bodyPr wrap="square" lIns="0" tIns="0" rIns="0" bIns="0" rtlCol="0" anchor="ctr"/>
+          <a:lstStyle/>
+          <a:p>
+            <a:pPr algn="ctr" indent="0" marL="0">
+              <a:buNone/>
+            </a:pPr>
+            <a:r>
+              <a:rPr lang="en-US" sz="900" b="1" dirty="0">
+                <a:solidFill>
+                  <a:srgbClr val="9D174D"/>
+                </a:solidFill>
+                <a:latin typeface="Trebuchet MS" pitchFamily="34" charset="0"/>
+                <a:ea typeface="Trebuchet MS" pitchFamily="34" charset="-122"/>
+                <a:cs typeface="Trebuchet MS" pitchFamily="34" charset="-120"/>
+              </a:rPr>
+              <a:t>n</a:t>
+            </a:r>
+            <a:endParaRPr lang="en-US" sz="900" dirty="0"/>
+          </a:p>
+        </p:txBody>
+      </p:sp>
+      <p:sp>
+        <p:nvSpPr>
+          <p:cNvPr id="56" name="Shape 54"/>
+          <p:cNvSpPr/>
+          <p:nvPr/>
+        </p:nvSpPr>
+        <p:spPr>
+          <a:xfrm>
+            <a:off x="7033565" y="4169664"/>
+            <a:ext cx="676656" cy="475488"/>
+          </a:xfrm>
+          <a:prstGeom prst="rect">
+            <a:avLst>
+              <a:gd name="adj" fmla="val 7692"/>
+            </a:avLst>
+          </a:prstGeom>
+          <a:solidFill>
+            <a:srgbClr val="FFFFFF"/>
+          </a:solidFill>
+          <a:ln w="12700">
+            <a:solidFill>
+              <a:srgbClr val="DB2777"/>
+            </a:solidFill>
+            <a:prstDash val="solid"/>
+          </a:ln>
+        </p:spPr>
+      </p:sp>
+      <p:sp>
+        <p:nvSpPr>
+          <p:cNvPr id="57" name="Text 55"/>
+          <p:cNvSpPr/>
+          <p:nvPr/>
+        </p:nvSpPr>
+        <p:spPr>
+          <a:xfrm>
+            <a:off x="7033565" y="4169664"/>
+            <a:ext cx="676656" cy="475488"/>
+          </a:xfrm>
+          <a:prstGeom prst="rect">
+            <a:avLst/>
+          </a:prstGeom>
+          <a:noFill/>
+          <a:ln/>
+        </p:spPr>
+        <p:txBody>
+          <a:bodyPr wrap="square" lIns="0" tIns="0" rIns="0" bIns="0" rtlCol="0" anchor="ctr"/>
+          <a:lstStyle/>
+          <a:p>
+            <a:pPr algn="ctr" indent="0" marL="0">
+              <a:buNone/>
+            </a:pPr>
+            <a:r>
+              <a:rPr lang="en-US" sz="900" b="1" dirty="0">
+                <a:solidFill>
+                  <a:srgbClr val="9D174D"/>
+                </a:solidFill>
+                <a:latin typeface="Trebuchet MS" pitchFamily="34" charset="0"/>
+                <a:ea typeface="Trebuchet MS" pitchFamily="34" charset="-122"/>
+                <a:cs typeface="Trebuchet MS" pitchFamily="34" charset="-120"/>
+              </a:rPr>
+              <a:t>e</a:t>
+            </a:r>
+            <a:endParaRPr lang="en-US" sz="900" dirty="0"/>
+          </a:p>
+        </p:txBody>
+      </p:sp>
+      <p:sp>
+        <p:nvSpPr>
+          <p:cNvPr id="58" name="Shape 56"/>
+          <p:cNvSpPr/>
+          <p:nvPr/>
+        </p:nvSpPr>
+        <p:spPr>
+          <a:xfrm>
+            <a:off x="7759598" y="4169664"/>
+            <a:ext cx="676656" cy="475488"/>
+          </a:xfrm>
+          <a:prstGeom prst="rect">
+            <a:avLst>
+              <a:gd name="adj" fmla="val 7692"/>
+            </a:avLst>
+          </a:prstGeom>
+          <a:solidFill>
+            <a:srgbClr val="FFFFFF"/>
+          </a:solidFill>
+          <a:ln w="12700">
+            <a:solidFill>
+              <a:srgbClr val="DB2777"/>
+            </a:solidFill>
+            <a:prstDash val="solid"/>
+          </a:ln>
+        </p:spPr>
+      </p:sp>
+      <p:sp>
+        <p:nvSpPr>
+          <p:cNvPr id="59" name="Text 57"/>
+          <p:cNvSpPr/>
+          <p:nvPr/>
+        </p:nvSpPr>
+        <p:spPr>
+          <a:xfrm>
+            <a:off x="7759598" y="4169664"/>
+            <a:ext cx="676656" cy="475488"/>
+          </a:xfrm>
+          <a:prstGeom prst="rect">
+            <a:avLst/>
+          </a:prstGeom>
+          <a:noFill/>
+          <a:ln/>
+        </p:spPr>
+        <p:txBody>
+          <a:bodyPr wrap="square" lIns="0" tIns="0" rIns="0" bIns="0" rtlCol="0" anchor="ctr"/>
+          <a:lstStyle/>
+          <a:p>
+            <a:pPr algn="ctr" indent="0" marL="0">
+              <a:buNone/>
+            </a:pPr>
+            <a:r>
+              <a:rPr lang="en-US" sz="900" b="1" dirty="0">
+                <a:solidFill>
+                  <a:srgbClr val="9D174D"/>
+                </a:solidFill>
+                <a:latin typeface="Trebuchet MS" pitchFamily="34" charset="0"/>
+                <a:ea typeface="Trebuchet MS" pitchFamily="34" charset="-122"/>
+                <a:cs typeface="Trebuchet MS" pitchFamily="34" charset="-120"/>
+              </a:rPr>
+              <a:t>d</a:t>
             </a:r>
             <a:endParaRPr lang="en-US" sz="900" dirty="0"/>
           </a:p>
@@ -11119,7 +12199,7 @@
                 <a:ea typeface="Calibri" pitchFamily="34" charset="-122"/>
                 <a:cs typeface="Calibri" pitchFamily="34" charset="-120"/>
               </a:rPr>
-              <a:t>Word Labs  •  wordlabs.app  •  Root: 'sweet' = having a pleasant sugary taste</a:t>
+              <a:t>Word Labs  •  wordlabs.app  •  Root: 'sweet' = pleasant sugary taste or smell</a:t>
             </a:r>
             <a:endParaRPr lang="en-US" sz="800" dirty="0"/>
           </a:p>
@@ -11258,7 +12338,7 @@
                 <a:ea typeface="Trebuchet MS" pitchFamily="34" charset="-122"/>
                 <a:cs typeface="Trebuchet MS" pitchFamily="34" charset="-120"/>
               </a:rPr>
-              <a:t>sweetest</a:t>
+              <a:t>sweetness</a:t>
             </a:r>
             <a:endParaRPr lang="en-US" sz="2800" dirty="0"/>
           </a:p>
@@ -11946,7 +13026,7 @@
                 <a:ea typeface="Calibri" pitchFamily="34" charset="-122"/>
                 <a:cs typeface="Calibri" pitchFamily="34" charset="-120"/>
               </a:rPr>
-              <a:t>Word Labs  •  wordlabs.app  •  Root: 'sweet' = having a pleasant sugary taste</a:t>
+              <a:t>Word Labs  •  wordlabs.app  •  Root: 'sweet' = pleasant sugary taste or smell</a:t>
             </a:r>
             <a:endParaRPr lang="en-US" sz="800" dirty="0"/>
           </a:p>
@@ -12085,7 +13165,7 @@
                 <a:ea typeface="Trebuchet MS" pitchFamily="34" charset="-122"/>
                 <a:cs typeface="Trebuchet MS" pitchFamily="34" charset="-120"/>
               </a:rPr>
-              <a:t>sweetest</a:t>
+              <a:t>sweetness</a:t>
             </a:r>
             <a:endParaRPr lang="en-US" sz="2800" dirty="0"/>
           </a:p>
@@ -12336,7 +13416,7 @@
                 <a:ea typeface="Trebuchet MS" pitchFamily="34" charset="-122"/>
                 <a:cs typeface="Trebuchet MS" pitchFamily="34" charset="-120"/>
               </a:rPr>
-              <a:t>est</a:t>
+              <a:t>ness</a:t>
             </a:r>
             <a:endParaRPr lang="en-US" sz="1300" dirty="0"/>
           </a:p>
@@ -12375,7 +13455,7 @@
                 <a:ea typeface="Calibri" pitchFamily="34" charset="-122"/>
                 <a:cs typeface="Calibri" pitchFamily="34" charset="-120"/>
               </a:rPr>
-              <a:t>the most</a:t>
+              <a:t>state or quality of</a:t>
             </a:r>
             <a:endParaRPr lang="en-US" sz="850" dirty="0"/>
           </a:p>
@@ -12931,7 +14011,7 @@
                 <a:ea typeface="Calibri" pitchFamily="34" charset="-122"/>
                 <a:cs typeface="Calibri" pitchFamily="34" charset="-120"/>
               </a:rPr>
-              <a:t>Word Labs  •  wordlabs.app  •  Root: 'sweet' = having a pleasant sugary taste</a:t>
+              <a:t>Word Labs  •  wordlabs.app  •  Root: 'sweet' = pleasant sugary taste or smell</a:t>
             </a:r>
             <a:endParaRPr lang="en-US" sz="800" dirty="0"/>
           </a:p>
@@ -13070,7 +14150,7 @@
                 <a:ea typeface="Trebuchet MS" pitchFamily="34" charset="-122"/>
                 <a:cs typeface="Trebuchet MS" pitchFamily="34" charset="-120"/>
               </a:rPr>
-              <a:t>sweetest</a:t>
+              <a:t>sweetness</a:t>
             </a:r>
             <a:endParaRPr lang="en-US" sz="2800" dirty="0"/>
           </a:p>
@@ -13321,7 +14401,7 @@
                 <a:ea typeface="Trebuchet MS" pitchFamily="34" charset="-122"/>
                 <a:cs typeface="Trebuchet MS" pitchFamily="34" charset="-120"/>
               </a:rPr>
-              <a:t>est</a:t>
+              <a:t>ness</a:t>
             </a:r>
             <a:endParaRPr lang="en-US" sz="1300" dirty="0"/>
           </a:p>
@@ -13360,7 +14440,7 @@
                 <a:ea typeface="Calibri" pitchFamily="34" charset="-122"/>
                 <a:cs typeface="Calibri" pitchFamily="34" charset="-120"/>
               </a:rPr>
-              <a:t>the most</a:t>
+              <a:t>state or quality of</a:t>
             </a:r>
             <a:endParaRPr lang="en-US" sz="850" dirty="0"/>
           </a:p>
@@ -13624,7 +14704,7 @@
                 <a:ea typeface="Trebuchet MS" pitchFamily="34" charset="-122"/>
                 <a:cs typeface="Trebuchet MS" pitchFamily="34" charset="-120"/>
               </a:rPr>
-              <a:t>est</a:t>
+              <a:t>ness</a:t>
             </a:r>
             <a:endParaRPr lang="en-US" sz="1400" dirty="0"/>
           </a:p>
@@ -13957,7 +15037,7 @@
                 <a:ea typeface="Calibri" pitchFamily="34" charset="-122"/>
                 <a:cs typeface="Calibri" pitchFamily="34" charset="-120"/>
               </a:rPr>
-              <a:t>Root 'sweet' — having a pleasant sugary taste</a:t>
+              <a:t>Root 'sweet' — pleasant sugary taste or smell</a:t>
             </a:r>
             <a:endParaRPr lang="en-US" sz="1600" dirty="0"/>
           </a:p>
@@ -14313,7 +15393,7 @@
                 <a:ea typeface="Calibri" pitchFamily="34" charset="-122"/>
                 <a:cs typeface="Calibri" pitchFamily="34" charset="-120"/>
               </a:rPr>
-              <a:t>Word Labs  •  wordlabs.app  •  Root: 'sweet' = having a pleasant sugary taste</a:t>
+              <a:t>Word Labs  •  wordlabs.app  •  Root: 'sweet' = pleasant sugary taste or smell</a:t>
             </a:r>
             <a:endParaRPr lang="en-US" sz="800" dirty="0"/>
           </a:p>
@@ -14452,7 +15532,7 @@
                 <a:ea typeface="Trebuchet MS" pitchFamily="34" charset="-122"/>
                 <a:cs typeface="Trebuchet MS" pitchFamily="34" charset="-120"/>
               </a:rPr>
-              <a:t>sweetest</a:t>
+              <a:t>sweetness</a:t>
             </a:r>
             <a:endParaRPr lang="en-US" sz="2800" dirty="0"/>
           </a:p>
@@ -14703,7 +15783,7 @@
                 <a:ea typeface="Trebuchet MS" pitchFamily="34" charset="-122"/>
                 <a:cs typeface="Trebuchet MS" pitchFamily="34" charset="-120"/>
               </a:rPr>
-              <a:t>est</a:t>
+              <a:t>ness</a:t>
             </a:r>
             <a:endParaRPr lang="en-US" sz="1300" dirty="0"/>
           </a:p>
@@ -14742,7 +15822,7 @@
                 <a:ea typeface="Calibri" pitchFamily="34" charset="-122"/>
                 <a:cs typeface="Calibri" pitchFamily="34" charset="-120"/>
               </a:rPr>
-              <a:t>the most</a:t>
+              <a:t>state or quality of</a:t>
             </a:r>
             <a:endParaRPr lang="en-US" sz="850" dirty="0"/>
           </a:p>
@@ -15006,7 +16086,7 @@
                 <a:ea typeface="Trebuchet MS" pitchFamily="34" charset="-122"/>
                 <a:cs typeface="Trebuchet MS" pitchFamily="34" charset="-120"/>
               </a:rPr>
-              <a:t>est</a:t>
+              <a:t>ness</a:t>
             </a:r>
             <a:endParaRPr lang="en-US" sz="1400" dirty="0"/>
           </a:p>
@@ -15363,7 +16443,7 @@
                 <a:ea typeface="Trebuchet MS" pitchFamily="34" charset="-122"/>
                 <a:cs typeface="Trebuchet MS" pitchFamily="34" charset="-120"/>
               </a:rPr>
-              <a:t>e</a:t>
+              <a:t>n</a:t>
             </a:r>
             <a:endParaRPr lang="en-US" sz="900" dirty="0"/>
           </a:p>
@@ -15429,7 +16509,7 @@
                 <a:ea typeface="Trebuchet MS" pitchFamily="34" charset="-122"/>
                 <a:cs typeface="Trebuchet MS" pitchFamily="34" charset="-120"/>
               </a:rPr>
-              <a:t>s</a:t>
+              <a:t>e</a:t>
             </a:r>
             <a:endParaRPr lang="en-US" sz="900" dirty="0"/>
           </a:p>
@@ -15495,7 +16575,7 @@
                 <a:ea typeface="Trebuchet MS" pitchFamily="34" charset="-122"/>
                 <a:cs typeface="Trebuchet MS" pitchFamily="34" charset="-120"/>
               </a:rPr>
-              <a:t>t</a:t>
+              <a:t>ss</a:t>
             </a:r>
             <a:endParaRPr lang="en-US" sz="900" dirty="0"/>
           </a:p>
@@ -16069,7 +17149,7 @@
                 <a:ea typeface="Calibri" pitchFamily="34" charset="-122"/>
                 <a:cs typeface="Calibri" pitchFamily="34" charset="-120"/>
               </a:rPr>
-              <a:t>Word Labs  •  wordlabs.app  •  Root: 'sweet' = having a pleasant sugary taste</a:t>
+              <a:t>Word Labs  •  wordlabs.app  •  Root: 'sweet' = pleasant sugary taste or smell</a:t>
             </a:r>
             <a:endParaRPr lang="en-US" sz="800" dirty="0"/>
           </a:p>
@@ -16403,7 +17483,7 @@
                 <a:ea typeface="Trebuchet MS" pitchFamily="34" charset="-122"/>
                 <a:cs typeface="Trebuchet MS" pitchFamily="34" charset="-120"/>
               </a:rPr>
-              <a:t>2</a:t>
+              <a:t>1</a:t>
             </a:r>
             <a:pPr algn="ctr" indent="0" marL="0">
               <a:buNone/>
@@ -16417,7 +17497,7 @@
                 <a:ea typeface="Trebuchet MS" pitchFamily="34" charset="-122"/>
                 <a:cs typeface="Trebuchet MS" pitchFamily="34" charset="-120"/>
               </a:rPr>
-              <a:t>  punctuation marks</a:t>
+              <a:t>  punctuation mark</a:t>
             </a:r>
             <a:endParaRPr lang="en-US" sz="2800" dirty="0"/>
           </a:p>
@@ -16709,7 +17789,7 @@
                 <a:ea typeface="Calibri" pitchFamily="34" charset="-122"/>
                 <a:cs typeface="Calibri" pitchFamily="34" charset="-120"/>
               </a:rPr>
-              <a:t>Word Labs  •  wordlabs.app  •  Root: 'sweet' = having a pleasant sugary taste</a:t>
+              <a:t>Word Labs  •  wordlabs.app  •  Root: 'sweet' = pleasant sugary taste or smell</a:t>
             </a:r>
             <a:endParaRPr lang="en-US" sz="800" dirty="0"/>
           </a:p>
@@ -16838,7 +17918,7 @@
                 <a:ea typeface="Calibri" pitchFamily="34" charset="-122"/>
                 <a:cs typeface="Calibri" pitchFamily="34" charset="-120"/>
               </a:rPr>
-              <a:t>sweeter</a:t>
+              <a:t>sweetheart</a:t>
             </a:r>
             <a:pPr algn="l" indent="0" marL="0">
               <a:buNone/>
@@ -16852,7 +17932,7 @@
                 <a:ea typeface="Calibri" pitchFamily="34" charset="-122"/>
                 <a:cs typeface="Calibri" pitchFamily="34" charset="-120"/>
               </a:rPr>
-              <a:t> the peaches became, the more </a:t>
+              <a:t> roses smelled </a:t>
             </a:r>
             <a:pPr algn="l" indent="0" marL="0">
               <a:buNone/>
@@ -16883,7 +17963,7 @@
                 <a:ea typeface="Calibri" pitchFamily="34" charset="-122"/>
                 <a:cs typeface="Calibri" pitchFamily="34" charset="-120"/>
               </a:rPr>
-              <a:t> the children laughed; their </a:t>
+              <a:t> in the garden, and their </a:t>
             </a:r>
             <a:pPr algn="l" indent="0" marL="0">
               <a:buNone/>
@@ -16900,7 +17980,7 @@
                 <a:ea typeface="Calibri" pitchFamily="34" charset="-122"/>
                 <a:cs typeface="Calibri" pitchFamily="34" charset="-120"/>
               </a:rPr>
-              <a:t>sweetheart</a:t>
+              <a:t>bittersweet</a:t>
             </a:r>
             <a:pPr algn="l" indent="0" marL="0">
               <a:buNone/>
@@ -16914,7 +17994,7 @@
                 <a:ea typeface="Calibri" pitchFamily="34" charset="-122"/>
                 <a:cs typeface="Calibri" pitchFamily="34" charset="-120"/>
               </a:rPr>
-              <a:t> grandmother had grown them in her garden.</a:t>
+              <a:t> fragrance filled the warm afternoon air.</a:t>
             </a:r>
             <a:endParaRPr lang="en-US" sz="1800" dirty="0"/>
           </a:p>
@@ -17069,7 +18149,7 @@
                 <a:ea typeface="Trebuchet MS" pitchFamily="34" charset="-122"/>
                 <a:cs typeface="Trebuchet MS" pitchFamily="34" charset="-120"/>
               </a:rPr>
-              <a:t>sweeter</a:t>
+              <a:t>sweetheart</a:t>
             </a:r>
             <a:endParaRPr lang="en-US" sz="1400" dirty="0"/>
           </a:p>
@@ -17325,7 +18405,7 @@
                 <a:ea typeface="Trebuchet MS" pitchFamily="34" charset="-122"/>
                 <a:cs typeface="Trebuchet MS" pitchFamily="34" charset="-120"/>
               </a:rPr>
-              <a:t>sweetheart</a:t>
+              <a:t>bittersweet</a:t>
             </a:r>
             <a:endParaRPr lang="en-US" sz="1400" dirty="0"/>
           </a:p>
@@ -17656,7 +18736,7 @@
                 <a:ea typeface="Calibri" pitchFamily="34" charset="-122"/>
                 <a:cs typeface="Calibri" pitchFamily="34" charset="-120"/>
               </a:rPr>
-              <a:t>Word Labs  •  wordlabs.app  •  Root: 'sweet' = having a pleasant sugary taste</a:t>
+              <a:t>Word Labs  •  wordlabs.app  •  Root: 'sweet' = pleasant sugary taste or smell</a:t>
             </a:r>
             <a:endParaRPr lang="en-US" sz="800" dirty="0"/>
           </a:p>
@@ -17795,7 +18875,7 @@
                 <a:ea typeface="Trebuchet MS" pitchFamily="34" charset="-122"/>
                 <a:cs typeface="Trebuchet MS" pitchFamily="34" charset="-120"/>
               </a:rPr>
-              <a:t>sweeter</a:t>
+              <a:t>sweetheart</a:t>
             </a:r>
             <a:endParaRPr lang="en-US" sz="2800" dirty="0"/>
           </a:p>
@@ -18483,7 +19563,7 @@
                 <a:ea typeface="Calibri" pitchFamily="34" charset="-122"/>
                 <a:cs typeface="Calibri" pitchFamily="34" charset="-120"/>
               </a:rPr>
-              <a:t>Word Labs  •  wordlabs.app  •  Root: 'sweet' = having a pleasant sugary taste</a:t>
+              <a:t>Word Labs  •  wordlabs.app  •  Root: 'sweet' = pleasant sugary taste or smell</a:t>
             </a:r>
             <a:endParaRPr lang="en-US" sz="800" dirty="0"/>
           </a:p>
@@ -18622,7 +19702,7 @@
                 <a:ea typeface="Trebuchet MS" pitchFamily="34" charset="-122"/>
                 <a:cs typeface="Trebuchet MS" pitchFamily="34" charset="-120"/>
               </a:rPr>
-              <a:t>sweeter</a:t>
+              <a:t>sweetheart</a:t>
             </a:r>
             <a:endParaRPr lang="en-US" sz="2800" dirty="0"/>
           </a:p>
@@ -18800,7 +19880,7 @@
                 <a:ea typeface="Calibri" pitchFamily="34" charset="-122"/>
                 <a:cs typeface="Calibri" pitchFamily="34" charset="-120"/>
               </a:rPr>
-              <a:t>pleasant sugary taste</a:t>
+              <a:t>pleasant, dear</a:t>
             </a:r>
             <a:endParaRPr lang="en-US" sz="850" dirty="0"/>
           </a:p>
@@ -18873,7 +19953,7 @@
                 <a:ea typeface="Trebuchet MS" pitchFamily="34" charset="-122"/>
                 <a:cs typeface="Trebuchet MS" pitchFamily="34" charset="-120"/>
               </a:rPr>
-              <a:t>er</a:t>
+              <a:t>heart</a:t>
             </a:r>
             <a:endParaRPr lang="en-US" sz="1300" dirty="0"/>
           </a:p>
@@ -18912,7 +19992,7 @@
                 <a:ea typeface="Calibri" pitchFamily="34" charset="-122"/>
                 <a:cs typeface="Calibri" pitchFamily="34" charset="-120"/>
               </a:rPr>
-              <a:t>more</a:t>
+              <a:t>centre of feeling or love</a:t>
             </a:r>
             <a:endParaRPr lang="en-US" sz="850" dirty="0"/>
           </a:p>
@@ -19468,7 +20548,7 @@
                 <a:ea typeface="Calibri" pitchFamily="34" charset="-122"/>
                 <a:cs typeface="Calibri" pitchFamily="34" charset="-120"/>
               </a:rPr>
-              <a:t>Word Labs  •  wordlabs.app  •  Root: 'sweet' = having a pleasant sugary taste</a:t>
+              <a:t>Word Labs  •  wordlabs.app  •  Root: 'sweet' = pleasant sugary taste or smell</a:t>
             </a:r>
             <a:endParaRPr lang="en-US" sz="800" dirty="0"/>
           </a:p>
@@ -19607,7 +20687,7 @@
                 <a:ea typeface="Trebuchet MS" pitchFamily="34" charset="-122"/>
                 <a:cs typeface="Trebuchet MS" pitchFamily="34" charset="-120"/>
               </a:rPr>
-              <a:t>sweeter</a:t>
+              <a:t>sweetheart</a:t>
             </a:r>
             <a:endParaRPr lang="en-US" sz="2800" dirty="0"/>
           </a:p>
@@ -19785,7 +20865,7 @@
                 <a:ea typeface="Calibri" pitchFamily="34" charset="-122"/>
                 <a:cs typeface="Calibri" pitchFamily="34" charset="-120"/>
               </a:rPr>
-              <a:t>pleasant sugary taste</a:t>
+              <a:t>pleasant, dear</a:t>
             </a:r>
             <a:endParaRPr lang="en-US" sz="850" dirty="0"/>
           </a:p>
@@ -19858,7 +20938,7 @@
                 <a:ea typeface="Trebuchet MS" pitchFamily="34" charset="-122"/>
                 <a:cs typeface="Trebuchet MS" pitchFamily="34" charset="-120"/>
               </a:rPr>
-              <a:t>er</a:t>
+              <a:t>heart</a:t>
             </a:r>
             <a:endParaRPr lang="en-US" sz="1300" dirty="0"/>
           </a:p>
@@ -19897,7 +20977,7 @@
                 <a:ea typeface="Calibri" pitchFamily="34" charset="-122"/>
                 <a:cs typeface="Calibri" pitchFamily="34" charset="-120"/>
               </a:rPr>
-              <a:t>more</a:t>
+              <a:t>centre of feeling or love</a:t>
             </a:r>
             <a:endParaRPr lang="en-US" sz="850" dirty="0"/>
           </a:p>
@@ -20161,7 +21241,7 @@
                 <a:ea typeface="Trebuchet MS" pitchFamily="34" charset="-122"/>
                 <a:cs typeface="Trebuchet MS" pitchFamily="34" charset="-120"/>
               </a:rPr>
-              <a:t>er</a:t>
+              <a:t>heart</a:t>
             </a:r>
             <a:endParaRPr lang="en-US" sz="1400" dirty="0"/>
           </a:p>
@@ -20585,7 +21665,7 @@
                 <a:ea typeface="Calibri" pitchFamily="34" charset="-122"/>
                 <a:cs typeface="Calibri" pitchFamily="34" charset="-120"/>
               </a:rPr>
-              <a:t>Word Labs  •  wordlabs.app  •  Root: 'sweet' = having a pleasant sugary taste</a:t>
+              <a:t>Word Labs  •  wordlabs.app  •  Root: 'sweet' = pleasant sugary taste or smell</a:t>
             </a:r>
             <a:endParaRPr lang="en-US" sz="800" dirty="0"/>
           </a:p>
@@ -20724,7 +21804,7 @@
                 <a:ea typeface="Trebuchet MS" pitchFamily="34" charset="-122"/>
                 <a:cs typeface="Trebuchet MS" pitchFamily="34" charset="-120"/>
               </a:rPr>
-              <a:t>sweeter</a:t>
+              <a:t>sweetheart</a:t>
             </a:r>
             <a:endParaRPr lang="en-US" sz="2800" dirty="0"/>
           </a:p>
@@ -20902,7 +21982,7 @@
                 <a:ea typeface="Calibri" pitchFamily="34" charset="-122"/>
                 <a:cs typeface="Calibri" pitchFamily="34" charset="-120"/>
               </a:rPr>
-              <a:t>pleasant sugary taste</a:t>
+              <a:t>pleasant, dear</a:t>
             </a:r>
             <a:endParaRPr lang="en-US" sz="850" dirty="0"/>
           </a:p>
@@ -20975,7 +22055,7 @@
                 <a:ea typeface="Trebuchet MS" pitchFamily="34" charset="-122"/>
                 <a:cs typeface="Trebuchet MS" pitchFamily="34" charset="-120"/>
               </a:rPr>
-              <a:t>er</a:t>
+              <a:t>heart</a:t>
             </a:r>
             <a:endParaRPr lang="en-US" sz="1300" dirty="0"/>
           </a:p>
@@ -21014,7 +22094,7 @@
                 <a:ea typeface="Calibri" pitchFamily="34" charset="-122"/>
                 <a:cs typeface="Calibri" pitchFamily="34" charset="-120"/>
               </a:rPr>
-              <a:t>more</a:t>
+              <a:t>centre of feeling or love</a:t>
             </a:r>
             <a:endParaRPr lang="en-US" sz="850" dirty="0"/>
           </a:p>
@@ -21278,7 +22358,7 @@
                 <a:ea typeface="Trebuchet MS" pitchFamily="34" charset="-122"/>
                 <a:cs typeface="Trebuchet MS" pitchFamily="34" charset="-120"/>
               </a:rPr>
-              <a:t>er</a:t>
+              <a:t>heart</a:t>
             </a:r>
             <a:endParaRPr lang="en-US" sz="1400" dirty="0"/>
           </a:p>
@@ -21385,7 +22465,7 @@
         </p:nvSpPr>
         <p:spPr>
           <a:xfrm>
-            <a:off x="2670048" y="4169664"/>
+            <a:off x="2254649" y="4169664"/>
             <a:ext cx="685800" cy="475488"/>
           </a:xfrm>
           <a:prstGeom prst="rect">
@@ -21412,7 +22492,7 @@
         </p:nvSpPr>
         <p:spPr>
           <a:xfrm>
-            <a:off x="2670048" y="4169664"/>
+            <a:off x="2254649" y="4169664"/>
             <a:ext cx="685800" cy="475488"/>
           </a:xfrm>
           <a:prstGeom prst="rect">
@@ -21451,7 +22531,7 @@
         </p:nvSpPr>
         <p:spPr>
           <a:xfrm>
-            <a:off x="4123944" y="4169664"/>
+            <a:off x="3293146" y="4169664"/>
             <a:ext cx="685800" cy="475488"/>
           </a:xfrm>
           <a:prstGeom prst="rect">
@@ -21478,7 +22558,7 @@
         </p:nvSpPr>
         <p:spPr>
           <a:xfrm>
-            <a:off x="4123944" y="4169664"/>
+            <a:off x="3293146" y="4169664"/>
             <a:ext cx="685800" cy="475488"/>
           </a:xfrm>
           <a:prstGeom prst="rect">
@@ -21517,7 +22597,7 @@
         </p:nvSpPr>
         <p:spPr>
           <a:xfrm>
-            <a:off x="5577840" y="4169664"/>
+            <a:off x="4331643" y="4169664"/>
             <a:ext cx="685800" cy="475488"/>
           </a:xfrm>
           <a:prstGeom prst="rect">
@@ -21544,7 +22624,7 @@
         </p:nvSpPr>
         <p:spPr>
           <a:xfrm>
-            <a:off x="5577840" y="4169664"/>
+            <a:off x="4331643" y="4169664"/>
             <a:ext cx="685800" cy="475488"/>
           </a:xfrm>
           <a:prstGeom prst="rect">
@@ -21583,7 +22663,7 @@
         </p:nvSpPr>
         <p:spPr>
           <a:xfrm>
-            <a:off x="7031736" y="4169664"/>
+            <a:off x="5370141" y="4169664"/>
             <a:ext cx="685800" cy="475488"/>
           </a:xfrm>
           <a:prstGeom prst="rect">
@@ -21610,7 +22690,7 @@
         </p:nvSpPr>
         <p:spPr>
           <a:xfrm>
-            <a:off x="7031736" y="4169664"/>
+            <a:off x="5370141" y="4169664"/>
             <a:ext cx="685800" cy="475488"/>
           </a:xfrm>
           <a:prstGeom prst="rect">
@@ -21635,7 +22715,139 @@
                 <a:ea typeface="Trebuchet MS" pitchFamily="34" charset="-122"/>
                 <a:cs typeface="Trebuchet MS" pitchFamily="34" charset="-120"/>
               </a:rPr>
-              <a:t>er</a:t>
+              <a:t>h</a:t>
+            </a:r>
+            <a:endParaRPr lang="en-US" sz="900" dirty="0"/>
+          </a:p>
+        </p:txBody>
+      </p:sp>
+      <p:sp>
+        <p:nvSpPr>
+          <p:cNvPr id="41" name="Shape 39"/>
+          <p:cNvSpPr/>
+          <p:nvPr/>
+        </p:nvSpPr>
+        <p:spPr>
+          <a:xfrm>
+            <a:off x="6408638" y="4169664"/>
+            <a:ext cx="685800" cy="475488"/>
+          </a:xfrm>
+          <a:prstGeom prst="rect">
+            <a:avLst>
+              <a:gd name="adj" fmla="val 7692"/>
+            </a:avLst>
+          </a:prstGeom>
+          <a:solidFill>
+            <a:srgbClr val="FFFFFF"/>
+          </a:solidFill>
+          <a:ln w="12700">
+            <a:solidFill>
+              <a:srgbClr val="DB2777"/>
+            </a:solidFill>
+            <a:prstDash val="solid"/>
+          </a:ln>
+        </p:spPr>
+      </p:sp>
+      <p:sp>
+        <p:nvSpPr>
+          <p:cNvPr id="42" name="Text 40"/>
+          <p:cNvSpPr/>
+          <p:nvPr/>
+        </p:nvSpPr>
+        <p:spPr>
+          <a:xfrm>
+            <a:off x="6408638" y="4169664"/>
+            <a:ext cx="685800" cy="475488"/>
+          </a:xfrm>
+          <a:prstGeom prst="rect">
+            <a:avLst/>
+          </a:prstGeom>
+          <a:noFill/>
+          <a:ln/>
+        </p:spPr>
+        <p:txBody>
+          <a:bodyPr wrap="square" lIns="0" tIns="0" rIns="0" bIns="0" rtlCol="0" anchor="ctr"/>
+          <a:lstStyle/>
+          <a:p>
+            <a:pPr algn="ctr" indent="0" marL="0">
+              <a:buNone/>
+            </a:pPr>
+            <a:r>
+              <a:rPr lang="en-US" sz="900" b="1" dirty="0">
+                <a:solidFill>
+                  <a:srgbClr val="9D174D"/>
+                </a:solidFill>
+                <a:latin typeface="Trebuchet MS" pitchFamily="34" charset="0"/>
+                <a:ea typeface="Trebuchet MS" pitchFamily="34" charset="-122"/>
+                <a:cs typeface="Trebuchet MS" pitchFamily="34" charset="-120"/>
+              </a:rPr>
+              <a:t>ar</a:t>
+            </a:r>
+            <a:endParaRPr lang="en-US" sz="900" dirty="0"/>
+          </a:p>
+        </p:txBody>
+      </p:sp>
+      <p:sp>
+        <p:nvSpPr>
+          <p:cNvPr id="43" name="Shape 41"/>
+          <p:cNvSpPr/>
+          <p:nvPr/>
+        </p:nvSpPr>
+        <p:spPr>
+          <a:xfrm>
+            <a:off x="7447135" y="4169664"/>
+            <a:ext cx="685800" cy="475488"/>
+          </a:xfrm>
+          <a:prstGeom prst="rect">
+            <a:avLst>
+              <a:gd name="adj" fmla="val 7692"/>
+            </a:avLst>
+          </a:prstGeom>
+          <a:solidFill>
+            <a:srgbClr val="FFFFFF"/>
+          </a:solidFill>
+          <a:ln w="12700">
+            <a:solidFill>
+              <a:srgbClr val="DB2777"/>
+            </a:solidFill>
+            <a:prstDash val="solid"/>
+          </a:ln>
+        </p:spPr>
+      </p:sp>
+      <p:sp>
+        <p:nvSpPr>
+          <p:cNvPr id="44" name="Text 42"/>
+          <p:cNvSpPr/>
+          <p:nvPr/>
+        </p:nvSpPr>
+        <p:spPr>
+          <a:xfrm>
+            <a:off x="7447135" y="4169664"/>
+            <a:ext cx="685800" cy="475488"/>
+          </a:xfrm>
+          <a:prstGeom prst="rect">
+            <a:avLst/>
+          </a:prstGeom>
+          <a:noFill/>
+          <a:ln/>
+        </p:spPr>
+        <p:txBody>
+          <a:bodyPr wrap="square" lIns="0" tIns="0" rIns="0" bIns="0" rtlCol="0" anchor="ctr"/>
+          <a:lstStyle/>
+          <a:p>
+            <a:pPr algn="ctr" indent="0" marL="0">
+              <a:buNone/>
+            </a:pPr>
+            <a:r>
+              <a:rPr lang="en-US" sz="900" b="1" dirty="0">
+                <a:solidFill>
+                  <a:srgbClr val="9D174D"/>
+                </a:solidFill>
+                <a:latin typeface="Trebuchet MS" pitchFamily="34" charset="0"/>
+                <a:ea typeface="Trebuchet MS" pitchFamily="34" charset="-122"/>
+                <a:cs typeface="Trebuchet MS" pitchFamily="34" charset="-120"/>
+              </a:rPr>
+              <a:t>t</a:t>
             </a:r>
             <a:endParaRPr lang="en-US" sz="900" dirty="0"/>
           </a:p>
@@ -21927,7 +23139,7 @@
                 <a:ea typeface="Calibri" pitchFamily="34" charset="-122"/>
                 <a:cs typeface="Calibri" pitchFamily="34" charset="-120"/>
               </a:rPr>
-              <a:t>Word Labs  •  wordlabs.app  •  Root: 'sweet' = having a pleasant sugary taste</a:t>
+              <a:t>Word Labs  •  wordlabs.app  •  Root: 'sweet' = pleasant sugary taste or smell</a:t>
             </a:r>
             <a:endParaRPr lang="en-US" sz="800" dirty="0"/>
           </a:p>
@@ -22754,7 +23966,7 @@
                 <a:ea typeface="Calibri" pitchFamily="34" charset="-122"/>
                 <a:cs typeface="Calibri" pitchFamily="34" charset="-120"/>
               </a:rPr>
-              <a:t>Word Labs  •  wordlabs.app  •  Root: 'sweet' = having a pleasant sugary taste</a:t>
+              <a:t>Word Labs  •  wordlabs.app  •  Root: 'sweet' = pleasant sugary taste or smell</a:t>
             </a:r>
             <a:endParaRPr lang="en-US" sz="800" dirty="0"/>
           </a:p>
@@ -23739,7 +24951,7 @@
                 <a:ea typeface="Calibri" pitchFamily="34" charset="-122"/>
                 <a:cs typeface="Calibri" pitchFamily="34" charset="-120"/>
               </a:rPr>
-              <a:t>Word Labs  •  wordlabs.app  •  Root: 'sweet' = having a pleasant sugary taste</a:t>
+              <a:t>Word Labs  •  wordlabs.app  •  Root: 'sweet' = pleasant sugary taste or smell</a:t>
             </a:r>
             <a:endParaRPr lang="en-US" sz="800" dirty="0"/>
           </a:p>
@@ -23812,7 +25024,7 @@
                 <a:ea typeface="Trebuchet MS" pitchFamily="34" charset="-122"/>
                 <a:cs typeface="Trebuchet MS" pitchFamily="34" charset="-120"/>
               </a:rPr>
-              <a:t>We are learning that the root 'sweet' means 'having a pleasant sugary taste'.</a:t>
+              <a:t>We are learning that the root 'sweet' means 'pleasant sugary taste or smell'.</a:t>
             </a:r>
             <a:endParaRPr lang="en-US" sz="2000" dirty="0"/>
           </a:p>
@@ -24458,7 +25670,7 @@
                 <a:ea typeface="Calibri" pitchFamily="34" charset="-122"/>
                 <a:cs typeface="Calibri" pitchFamily="34" charset="-120"/>
               </a:rPr>
-              <a:t>Word Labs  •  wordlabs.app  •  Root: 'sweet' = having a pleasant sugary taste</a:t>
+              <a:t>Word Labs  •  wordlabs.app  •  Root: 'sweet' = pleasant sugary taste or smell</a:t>
             </a:r>
             <a:endParaRPr lang="en-US" sz="800" dirty="0"/>
           </a:p>
@@ -25575,7 +26787,7 @@
                 <a:ea typeface="Calibri" pitchFamily="34" charset="-122"/>
                 <a:cs typeface="Calibri" pitchFamily="34" charset="-120"/>
               </a:rPr>
-              <a:t>Word Labs  •  wordlabs.app  •  Root: 'sweet' = having a pleasant sugary taste</a:t>
+              <a:t>Word Labs  •  wordlabs.app  •  Root: 'sweet' = pleasant sugary taste or smell</a:t>
             </a:r>
             <a:endParaRPr lang="en-US" sz="800" dirty="0"/>
           </a:p>
@@ -26691,7 +27903,7 @@
                 <a:ea typeface="Trebuchet MS" pitchFamily="34" charset="-122"/>
                 <a:cs typeface="Trebuchet MS" pitchFamily="34" charset="-120"/>
               </a:rPr>
-              <a:t>y</a:t>
+              <a:t>ee</a:t>
             </a:r>
             <a:endParaRPr lang="en-US" sz="900" dirty="0"/>
           </a:p>
@@ -26983,7 +28195,7 @@
                 <a:ea typeface="Calibri" pitchFamily="34" charset="-122"/>
                 <a:cs typeface="Calibri" pitchFamily="34" charset="-120"/>
               </a:rPr>
-              <a:t>Word Labs  •  wordlabs.app  •  Root: 'sweet' = having a pleasant sugary taste</a:t>
+              <a:t>Word Labs  •  wordlabs.app  •  Root: 'sweet' = pleasant sugary taste or smell</a:t>
             </a:r>
             <a:endParaRPr lang="en-US" sz="800" dirty="0"/>
           </a:p>
@@ -27122,7 +28334,7 @@
                 <a:ea typeface="Trebuchet MS" pitchFamily="34" charset="-122"/>
                 <a:cs typeface="Trebuchet MS" pitchFamily="34" charset="-120"/>
               </a:rPr>
-              <a:t>sweetheart</a:t>
+              <a:t>bittersweet</a:t>
             </a:r>
             <a:endParaRPr lang="en-US" sz="2800" dirty="0"/>
           </a:p>
@@ -27810,7 +29022,7 @@
                 <a:ea typeface="Calibri" pitchFamily="34" charset="-122"/>
                 <a:cs typeface="Calibri" pitchFamily="34" charset="-120"/>
               </a:rPr>
-              <a:t>Word Labs  •  wordlabs.app  •  Root: 'sweet' = having a pleasant sugary taste</a:t>
+              <a:t>Word Labs  •  wordlabs.app  •  Root: 'sweet' = pleasant sugary taste or smell</a:t>
             </a:r>
             <a:endParaRPr lang="en-US" sz="800" dirty="0"/>
           </a:p>
@@ -27949,7 +29161,7 @@
                 <a:ea typeface="Trebuchet MS" pitchFamily="34" charset="-122"/>
                 <a:cs typeface="Trebuchet MS" pitchFamily="34" charset="-120"/>
               </a:rPr>
-              <a:t>sweetheart</a:t>
+              <a:t>bittersweet</a:t>
             </a:r>
             <a:endParaRPr lang="en-US" sz="2800" dirty="0"/>
           </a:p>
@@ -28038,11 +29250,11 @@
             </a:avLst>
           </a:prstGeom>
           <a:solidFill>
-            <a:srgbClr val="CCFBF1"/>
+            <a:srgbClr val="DDD6FE"/>
           </a:solidFill>
           <a:ln w="19050">
             <a:solidFill>
-              <a:srgbClr val="0D9488"/>
+              <a:srgbClr val="7C3AED"/>
             </a:solidFill>
             <a:prstDash val="solid"/>
           </a:ln>
@@ -28082,13 +29294,13 @@
             <a:r>
               <a:rPr lang="en-US" sz="1300" b="1" dirty="0">
                 <a:solidFill>
-                  <a:srgbClr val="0F766E"/>
+                  <a:srgbClr val="4C1D95"/>
                 </a:solidFill>
                 <a:latin typeface="Trebuchet MS" pitchFamily="34" charset="0"/>
                 <a:ea typeface="Trebuchet MS" pitchFamily="34" charset="-122"/>
                 <a:cs typeface="Trebuchet MS" pitchFamily="34" charset="-120"/>
               </a:rPr>
-              <a:t>sweet</a:t>
+              <a:t>bitter</a:t>
             </a:r>
             <a:endParaRPr lang="en-US" sz="1300" dirty="0"/>
           </a:p>
@@ -28127,7 +29339,7 @@
                 <a:ea typeface="Calibri" pitchFamily="34" charset="-122"/>
                 <a:cs typeface="Calibri" pitchFamily="34" charset="-120"/>
               </a:rPr>
-              <a:t>pleasant sugary taste</a:t>
+              <a:t>sharp unpleasant taste</a:t>
             </a:r>
             <a:endParaRPr lang="en-US" sz="850" dirty="0"/>
           </a:p>
@@ -28150,11 +29362,11 @@
             </a:avLst>
           </a:prstGeom>
           <a:solidFill>
-            <a:srgbClr val="FCE7F3"/>
+            <a:srgbClr val="CCFBF1"/>
           </a:solidFill>
           <a:ln w="19050">
             <a:solidFill>
-              <a:srgbClr val="DB2777"/>
+              <a:srgbClr val="0D9488"/>
             </a:solidFill>
             <a:prstDash val="solid"/>
           </a:ln>
@@ -28194,13 +29406,13 @@
             <a:r>
               <a:rPr lang="en-US" sz="1300" b="1" dirty="0">
                 <a:solidFill>
-                  <a:srgbClr val="9D174D"/>
+                  <a:srgbClr val="0F766E"/>
                 </a:solidFill>
                 <a:latin typeface="Trebuchet MS" pitchFamily="34" charset="0"/>
                 <a:ea typeface="Trebuchet MS" pitchFamily="34" charset="-122"/>
                 <a:cs typeface="Trebuchet MS" pitchFamily="34" charset="-120"/>
               </a:rPr>
-              <a:t>heart</a:t>
+              <a:t>sweet</a:t>
             </a:r>
             <a:endParaRPr lang="en-US" sz="1300" dirty="0"/>
           </a:p>
@@ -28239,7 +29451,7 @@
                 <a:ea typeface="Calibri" pitchFamily="34" charset="-122"/>
                 <a:cs typeface="Calibri" pitchFamily="34" charset="-120"/>
               </a:rPr>
-              <a:t>the centre of feeling and love</a:t>
+              <a:t>pleasant sugary taste</a:t>
             </a:r>
             <a:endParaRPr lang="en-US" sz="850" dirty="0"/>
           </a:p>
@@ -28795,7 +30007,7 @@
                 <a:ea typeface="Calibri" pitchFamily="34" charset="-122"/>
                 <a:cs typeface="Calibri" pitchFamily="34" charset="-120"/>
               </a:rPr>
-              <a:t>Word Labs  •  wordlabs.app  •  Root: 'sweet' = having a pleasant sugary taste</a:t>
+              <a:t>Word Labs  •  wordlabs.app  •  Root: 'sweet' = pleasant sugary taste or smell</a:t>
             </a:r>
             <a:endParaRPr lang="en-US" sz="800" dirty="0"/>
           </a:p>
@@ -28934,7 +30146,7 @@
                 <a:ea typeface="Trebuchet MS" pitchFamily="34" charset="-122"/>
                 <a:cs typeface="Trebuchet MS" pitchFamily="34" charset="-120"/>
               </a:rPr>
-              <a:t>sweetheart</a:t>
+              <a:t>bittersweet</a:t>
             </a:r>
             <a:endParaRPr lang="en-US" sz="2800" dirty="0"/>
           </a:p>
@@ -29023,11 +30235,11 @@
             </a:avLst>
           </a:prstGeom>
           <a:solidFill>
-            <a:srgbClr val="CCFBF1"/>
+            <a:srgbClr val="DDD6FE"/>
           </a:solidFill>
           <a:ln w="19050">
             <a:solidFill>
-              <a:srgbClr val="0D9488"/>
+              <a:srgbClr val="7C3AED"/>
             </a:solidFill>
             <a:prstDash val="solid"/>
           </a:ln>
@@ -29067,13 +30279,13 @@
             <a:r>
               <a:rPr lang="en-US" sz="1300" b="1" dirty="0">
                 <a:solidFill>
-                  <a:srgbClr val="0F766E"/>
+                  <a:srgbClr val="4C1D95"/>
                 </a:solidFill>
                 <a:latin typeface="Trebuchet MS" pitchFamily="34" charset="0"/>
                 <a:ea typeface="Trebuchet MS" pitchFamily="34" charset="-122"/>
                 <a:cs typeface="Trebuchet MS" pitchFamily="34" charset="-120"/>
               </a:rPr>
-              <a:t>sweet</a:t>
+              <a:t>bitter</a:t>
             </a:r>
             <a:endParaRPr lang="en-US" sz="1300" dirty="0"/>
           </a:p>
@@ -29112,7 +30324,7 @@
                 <a:ea typeface="Calibri" pitchFamily="34" charset="-122"/>
                 <a:cs typeface="Calibri" pitchFamily="34" charset="-120"/>
               </a:rPr>
-              <a:t>pleasant sugary taste</a:t>
+              <a:t>sharp unpleasant taste</a:t>
             </a:r>
             <a:endParaRPr lang="en-US" sz="850" dirty="0"/>
           </a:p>
@@ -29135,11 +30347,11 @@
             </a:avLst>
           </a:prstGeom>
           <a:solidFill>
-            <a:srgbClr val="FCE7F3"/>
+            <a:srgbClr val="CCFBF1"/>
           </a:solidFill>
           <a:ln w="19050">
             <a:solidFill>
-              <a:srgbClr val="DB2777"/>
+              <a:srgbClr val="0D9488"/>
             </a:solidFill>
             <a:prstDash val="solid"/>
           </a:ln>
@@ -29179,13 +30391,13 @@
             <a:r>
               <a:rPr lang="en-US" sz="1300" b="1" dirty="0">
                 <a:solidFill>
-                  <a:srgbClr val="9D174D"/>
+                  <a:srgbClr val="0F766E"/>
                 </a:solidFill>
                 <a:latin typeface="Trebuchet MS" pitchFamily="34" charset="0"/>
                 <a:ea typeface="Trebuchet MS" pitchFamily="34" charset="-122"/>
                 <a:cs typeface="Trebuchet MS" pitchFamily="34" charset="-120"/>
               </a:rPr>
-              <a:t>heart</a:t>
+              <a:t>sweet</a:t>
             </a:r>
             <a:endParaRPr lang="en-US" sz="1300" dirty="0"/>
           </a:p>
@@ -29224,7 +30436,7 @@
                 <a:ea typeface="Calibri" pitchFamily="34" charset="-122"/>
                 <a:cs typeface="Calibri" pitchFamily="34" charset="-120"/>
               </a:rPr>
-              <a:t>the centre of feeling and love</a:t>
+              <a:t>pleasant sugary taste</a:t>
             </a:r>
             <a:endParaRPr lang="en-US" sz="850" dirty="0"/>
           </a:p>
@@ -29331,7 +30543,7 @@
         </p:nvSpPr>
         <p:spPr>
           <a:xfrm>
-            <a:off x="2999232" y="3364992"/>
+            <a:off x="2313432" y="3364992"/>
             <a:ext cx="1645920" cy="475488"/>
           </a:xfrm>
           <a:prstGeom prst="rect">
@@ -29358,7 +30570,7 @@
         </p:nvSpPr>
         <p:spPr>
           <a:xfrm>
-            <a:off x="2999232" y="3364992"/>
+            <a:off x="2313432" y="3364992"/>
             <a:ext cx="1645920" cy="475488"/>
           </a:xfrm>
           <a:prstGeom prst="rect">
@@ -29383,7 +30595,7 @@
                 <a:ea typeface="Trebuchet MS" pitchFamily="34" charset="-122"/>
                 <a:cs typeface="Trebuchet MS" pitchFamily="34" charset="-120"/>
               </a:rPr>
-              <a:t>sweet</a:t>
+              <a:t>bit</a:t>
             </a:r>
             <a:endParaRPr lang="en-US" sz="1400" dirty="0"/>
           </a:p>
@@ -29397,8 +30609,8 @@
         </p:nvSpPr>
         <p:spPr>
           <a:xfrm>
-            <a:off x="4645152" y="3364992"/>
-            <a:ext cx="1097280" cy="475488"/>
+            <a:off x="3959352" y="3364992"/>
+            <a:ext cx="411480" cy="475488"/>
           </a:xfrm>
           <a:prstGeom prst="rect">
             <a:avLst/>
@@ -29436,7 +30648,7 @@
         </p:nvSpPr>
         <p:spPr>
           <a:xfrm>
-            <a:off x="5742432" y="3364992"/>
+            <a:off x="4370832" y="3364992"/>
             <a:ext cx="1645920" cy="475488"/>
           </a:xfrm>
           <a:prstGeom prst="rect">
@@ -29463,7 +30675,7 @@
         </p:nvSpPr>
         <p:spPr>
           <a:xfrm>
-            <a:off x="5742432" y="3364992"/>
+            <a:off x="4370832" y="3364992"/>
             <a:ext cx="1645920" cy="475488"/>
           </a:xfrm>
           <a:prstGeom prst="rect">
@@ -29488,7 +30700,7 @@
                 <a:ea typeface="Trebuchet MS" pitchFamily="34" charset="-122"/>
                 <a:cs typeface="Trebuchet MS" pitchFamily="34" charset="-120"/>
               </a:rPr>
-              <a:t>heart</a:t>
+              <a:t>ter</a:t>
             </a:r>
             <a:endParaRPr lang="en-US" sz="1400" dirty="0"/>
           </a:p>
@@ -29496,7 +30708,112 @@
       </p:sp>
       <p:sp>
         <p:nvSpPr>
-          <p:cNvPr id="30" name="Shape 28"/>
+          <p:cNvPr id="30" name="Text 28"/>
+          <p:cNvSpPr/>
+          <p:nvPr/>
+        </p:nvSpPr>
+        <p:spPr>
+          <a:xfrm>
+            <a:off x="6016752" y="3364992"/>
+            <a:ext cx="411480" cy="475488"/>
+          </a:xfrm>
+          <a:prstGeom prst="rect">
+            <a:avLst/>
+          </a:prstGeom>
+          <a:noFill/>
+          <a:ln/>
+        </p:spPr>
+        <p:txBody>
+          <a:bodyPr wrap="square" lIns="0" tIns="0" rIns="0" bIns="0" rtlCol="0" anchor="ctr"/>
+          <a:lstStyle/>
+          <a:p>
+            <a:pPr algn="ctr" indent="0" marL="0">
+              <a:buNone/>
+            </a:pPr>
+            <a:r>
+              <a:rPr lang="en-US" sz="1600" b="1" dirty="0">
+                <a:solidFill>
+                  <a:srgbClr val="0D9488"/>
+                </a:solidFill>
+                <a:latin typeface="Trebuchet MS" pitchFamily="34" charset="0"/>
+                <a:ea typeface="Trebuchet MS" pitchFamily="34" charset="-122"/>
+                <a:cs typeface="Trebuchet MS" pitchFamily="34" charset="-120"/>
+              </a:rPr>
+              <a:t>·</a:t>
+            </a:r>
+            <a:endParaRPr lang="en-US" sz="1600" dirty="0"/>
+          </a:p>
+        </p:txBody>
+      </p:sp>
+      <p:sp>
+        <p:nvSpPr>
+          <p:cNvPr id="31" name="Shape 29"/>
+          <p:cNvSpPr/>
+          <p:nvPr/>
+        </p:nvSpPr>
+        <p:spPr>
+          <a:xfrm>
+            <a:off x="6428232" y="3364992"/>
+            <a:ext cx="1645920" cy="475488"/>
+          </a:xfrm>
+          <a:prstGeom prst="rect">
+            <a:avLst>
+              <a:gd name="adj" fmla="val 9615"/>
+            </a:avLst>
+          </a:prstGeom>
+          <a:solidFill>
+            <a:srgbClr val="FFFFFF"/>
+          </a:solidFill>
+          <a:ln w="12700">
+            <a:solidFill>
+              <a:srgbClr val="0D9488"/>
+            </a:solidFill>
+            <a:prstDash val="solid"/>
+          </a:ln>
+        </p:spPr>
+      </p:sp>
+      <p:sp>
+        <p:nvSpPr>
+          <p:cNvPr id="32" name="Text 30"/>
+          <p:cNvSpPr/>
+          <p:nvPr/>
+        </p:nvSpPr>
+        <p:spPr>
+          <a:xfrm>
+            <a:off x="6428232" y="3364992"/>
+            <a:ext cx="1645920" cy="475488"/>
+          </a:xfrm>
+          <a:prstGeom prst="rect">
+            <a:avLst/>
+          </a:prstGeom>
+          <a:noFill/>
+          <a:ln/>
+        </p:spPr>
+        <p:txBody>
+          <a:bodyPr wrap="square" lIns="0" tIns="0" rIns="0" bIns="0" rtlCol="0" anchor="ctr"/>
+          <a:lstStyle/>
+          <a:p>
+            <a:pPr algn="ctr" indent="0" marL="0">
+              <a:buNone/>
+            </a:pPr>
+            <a:r>
+              <a:rPr lang="en-US" sz="1400" b="1" dirty="0">
+                <a:solidFill>
+                  <a:srgbClr val="0D9488"/>
+                </a:solidFill>
+                <a:latin typeface="Trebuchet MS" pitchFamily="34" charset="0"/>
+                <a:ea typeface="Trebuchet MS" pitchFamily="34" charset="-122"/>
+                <a:cs typeface="Trebuchet MS" pitchFamily="34" charset="-120"/>
+              </a:rPr>
+              <a:t>sweet</a:t>
+            </a:r>
+            <a:endParaRPr lang="en-US" sz="1400" dirty="0"/>
+          </a:p>
+        </p:txBody>
+      </p:sp>
+      <p:sp>
+        <p:nvSpPr>
+          <p:cNvPr id="33" name="Shape 31"/>
           <p:cNvSpPr/>
           <p:nvPr/>
         </p:nvSpPr>
@@ -29523,7 +30840,7 @@
       </p:sp>
       <p:sp>
         <p:nvSpPr>
-          <p:cNvPr id="31" name="Text 29"/>
+          <p:cNvPr id="34" name="Text 32"/>
           <p:cNvSpPr/>
           <p:nvPr/>
         </p:nvSpPr>
@@ -29562,7 +30879,7 @@
       </p:sp>
       <p:sp>
         <p:nvSpPr>
-          <p:cNvPr id="32" name="Shape 30"/>
+          <p:cNvPr id="35" name="Shape 33"/>
           <p:cNvSpPr/>
           <p:nvPr/>
         </p:nvSpPr>
@@ -29589,7 +30906,7 @@
       </p:sp>
       <p:sp>
         <p:nvSpPr>
-          <p:cNvPr id="33" name="Text 31"/>
+          <p:cNvPr id="36" name="Text 34"/>
           <p:cNvSpPr/>
           <p:nvPr/>
         </p:nvSpPr>
@@ -29912,7 +31229,7 @@
                 <a:ea typeface="Calibri" pitchFamily="34" charset="-122"/>
                 <a:cs typeface="Calibri" pitchFamily="34" charset="-120"/>
               </a:rPr>
-              <a:t>Word Labs  •  wordlabs.app  •  Root: 'sweet' = having a pleasant sugary taste</a:t>
+              <a:t>Word Labs  •  wordlabs.app  •  Root: 'sweet' = pleasant sugary taste or smell</a:t>
             </a:r>
             <a:endParaRPr lang="en-US" sz="800" dirty="0"/>
           </a:p>
@@ -30051,7 +31368,7 @@
                 <a:ea typeface="Trebuchet MS" pitchFamily="34" charset="-122"/>
                 <a:cs typeface="Trebuchet MS" pitchFamily="34" charset="-120"/>
               </a:rPr>
-              <a:t>sweetheart</a:t>
+              <a:t>bittersweet</a:t>
             </a:r>
             <a:endParaRPr lang="en-US" sz="2800" dirty="0"/>
           </a:p>
@@ -30140,11 +31457,11 @@
             </a:avLst>
           </a:prstGeom>
           <a:solidFill>
-            <a:srgbClr val="CCFBF1"/>
+            <a:srgbClr val="DDD6FE"/>
           </a:solidFill>
           <a:ln w="19050">
             <a:solidFill>
-              <a:srgbClr val="0D9488"/>
+              <a:srgbClr val="7C3AED"/>
             </a:solidFill>
             <a:prstDash val="solid"/>
           </a:ln>
@@ -30184,13 +31501,13 @@
             <a:r>
               <a:rPr lang="en-US" sz="1300" b="1" dirty="0">
                 <a:solidFill>
-                  <a:srgbClr val="0F766E"/>
+                  <a:srgbClr val="4C1D95"/>
                 </a:solidFill>
                 <a:latin typeface="Trebuchet MS" pitchFamily="34" charset="0"/>
                 <a:ea typeface="Trebuchet MS" pitchFamily="34" charset="-122"/>
                 <a:cs typeface="Trebuchet MS" pitchFamily="34" charset="-120"/>
               </a:rPr>
-              <a:t>sweet</a:t>
+              <a:t>bitter</a:t>
             </a:r>
             <a:endParaRPr lang="en-US" sz="1300" dirty="0"/>
           </a:p>
@@ -30229,7 +31546,7 @@
                 <a:ea typeface="Calibri" pitchFamily="34" charset="-122"/>
                 <a:cs typeface="Calibri" pitchFamily="34" charset="-120"/>
               </a:rPr>
-              <a:t>pleasant sugary taste</a:t>
+              <a:t>sharp unpleasant taste</a:t>
             </a:r>
             <a:endParaRPr lang="en-US" sz="850" dirty="0"/>
           </a:p>
@@ -30252,11 +31569,11 @@
             </a:avLst>
           </a:prstGeom>
           <a:solidFill>
-            <a:srgbClr val="FCE7F3"/>
+            <a:srgbClr val="CCFBF1"/>
           </a:solidFill>
           <a:ln w="19050">
             <a:solidFill>
-              <a:srgbClr val="DB2777"/>
+              <a:srgbClr val="0D9488"/>
             </a:solidFill>
             <a:prstDash val="solid"/>
           </a:ln>
@@ -30296,13 +31613,13 @@
             <a:r>
               <a:rPr lang="en-US" sz="1300" b="1" dirty="0">
                 <a:solidFill>
-                  <a:srgbClr val="9D174D"/>
+                  <a:srgbClr val="0F766E"/>
                 </a:solidFill>
                 <a:latin typeface="Trebuchet MS" pitchFamily="34" charset="0"/>
                 <a:ea typeface="Trebuchet MS" pitchFamily="34" charset="-122"/>
                 <a:cs typeface="Trebuchet MS" pitchFamily="34" charset="-120"/>
               </a:rPr>
-              <a:t>heart</a:t>
+              <a:t>sweet</a:t>
             </a:r>
             <a:endParaRPr lang="en-US" sz="1300" dirty="0"/>
           </a:p>
@@ -30341,7 +31658,7 @@
                 <a:ea typeface="Calibri" pitchFamily="34" charset="-122"/>
                 <a:cs typeface="Calibri" pitchFamily="34" charset="-120"/>
               </a:rPr>
-              <a:t>the centre of feeling and love</a:t>
+              <a:t>pleasant sugary taste</a:t>
             </a:r>
             <a:endParaRPr lang="en-US" sz="850" dirty="0"/>
           </a:p>
@@ -30448,7 +31765,7 @@
         </p:nvSpPr>
         <p:spPr>
           <a:xfrm>
-            <a:off x="2999232" y="3364992"/>
+            <a:off x="2313432" y="3364992"/>
             <a:ext cx="1645920" cy="475488"/>
           </a:xfrm>
           <a:prstGeom prst="rect">
@@ -30475,7 +31792,7 @@
         </p:nvSpPr>
         <p:spPr>
           <a:xfrm>
-            <a:off x="2999232" y="3364992"/>
+            <a:off x="2313432" y="3364992"/>
             <a:ext cx="1645920" cy="475488"/>
           </a:xfrm>
           <a:prstGeom prst="rect">
@@ -30500,7 +31817,7 @@
                 <a:ea typeface="Trebuchet MS" pitchFamily="34" charset="-122"/>
                 <a:cs typeface="Trebuchet MS" pitchFamily="34" charset="-120"/>
               </a:rPr>
-              <a:t>sweet</a:t>
+              <a:t>bit</a:t>
             </a:r>
             <a:endParaRPr lang="en-US" sz="1400" dirty="0"/>
           </a:p>
@@ -30514,8 +31831,8 @@
         </p:nvSpPr>
         <p:spPr>
           <a:xfrm>
-            <a:off x="4645152" y="3364992"/>
-            <a:ext cx="1097280" cy="475488"/>
+            <a:off x="3959352" y="3364992"/>
+            <a:ext cx="411480" cy="475488"/>
           </a:xfrm>
           <a:prstGeom prst="rect">
             <a:avLst/>
@@ -30553,7 +31870,7 @@
         </p:nvSpPr>
         <p:spPr>
           <a:xfrm>
-            <a:off x="5742432" y="3364992"/>
+            <a:off x="4370832" y="3364992"/>
             <a:ext cx="1645920" cy="475488"/>
           </a:xfrm>
           <a:prstGeom prst="rect">
@@ -30580,7 +31897,7 @@
         </p:nvSpPr>
         <p:spPr>
           <a:xfrm>
-            <a:off x="5742432" y="3364992"/>
+            <a:off x="4370832" y="3364992"/>
             <a:ext cx="1645920" cy="475488"/>
           </a:xfrm>
           <a:prstGeom prst="rect">
@@ -30605,7 +31922,7 @@
                 <a:ea typeface="Trebuchet MS" pitchFamily="34" charset="-122"/>
                 <a:cs typeface="Trebuchet MS" pitchFamily="34" charset="-120"/>
               </a:rPr>
-              <a:t>heart</a:t>
+              <a:t>ter</a:t>
             </a:r>
             <a:endParaRPr lang="en-US" sz="1400" dirty="0"/>
           </a:p>
@@ -30613,7 +31930,112 @@
       </p:sp>
       <p:sp>
         <p:nvSpPr>
-          <p:cNvPr id="30" name="Shape 28"/>
+          <p:cNvPr id="30" name="Text 28"/>
+          <p:cNvSpPr/>
+          <p:nvPr/>
+        </p:nvSpPr>
+        <p:spPr>
+          <a:xfrm>
+            <a:off x="6016752" y="3364992"/>
+            <a:ext cx="411480" cy="475488"/>
+          </a:xfrm>
+          <a:prstGeom prst="rect">
+            <a:avLst/>
+          </a:prstGeom>
+          <a:noFill/>
+          <a:ln/>
+        </p:spPr>
+        <p:txBody>
+          <a:bodyPr wrap="square" lIns="0" tIns="0" rIns="0" bIns="0" rtlCol="0" anchor="ctr"/>
+          <a:lstStyle/>
+          <a:p>
+            <a:pPr algn="ctr" indent="0" marL="0">
+              <a:buNone/>
+            </a:pPr>
+            <a:r>
+              <a:rPr lang="en-US" sz="1600" b="1" dirty="0">
+                <a:solidFill>
+                  <a:srgbClr val="0D9488"/>
+                </a:solidFill>
+                <a:latin typeface="Trebuchet MS" pitchFamily="34" charset="0"/>
+                <a:ea typeface="Trebuchet MS" pitchFamily="34" charset="-122"/>
+                <a:cs typeface="Trebuchet MS" pitchFamily="34" charset="-120"/>
+              </a:rPr>
+              <a:t>·</a:t>
+            </a:r>
+            <a:endParaRPr lang="en-US" sz="1600" dirty="0"/>
+          </a:p>
+        </p:txBody>
+      </p:sp>
+      <p:sp>
+        <p:nvSpPr>
+          <p:cNvPr id="31" name="Shape 29"/>
+          <p:cNvSpPr/>
+          <p:nvPr/>
+        </p:nvSpPr>
+        <p:spPr>
+          <a:xfrm>
+            <a:off x="6428232" y="3364992"/>
+            <a:ext cx="1645920" cy="475488"/>
+          </a:xfrm>
+          <a:prstGeom prst="rect">
+            <a:avLst>
+              <a:gd name="adj" fmla="val 9615"/>
+            </a:avLst>
+          </a:prstGeom>
+          <a:solidFill>
+            <a:srgbClr val="FFFFFF"/>
+          </a:solidFill>
+          <a:ln w="12700">
+            <a:solidFill>
+              <a:srgbClr val="0D9488"/>
+            </a:solidFill>
+            <a:prstDash val="solid"/>
+          </a:ln>
+        </p:spPr>
+      </p:sp>
+      <p:sp>
+        <p:nvSpPr>
+          <p:cNvPr id="32" name="Text 30"/>
+          <p:cNvSpPr/>
+          <p:nvPr/>
+        </p:nvSpPr>
+        <p:spPr>
+          <a:xfrm>
+            <a:off x="6428232" y="3364992"/>
+            <a:ext cx="1645920" cy="475488"/>
+          </a:xfrm>
+          <a:prstGeom prst="rect">
+            <a:avLst/>
+          </a:prstGeom>
+          <a:noFill/>
+          <a:ln/>
+        </p:spPr>
+        <p:txBody>
+          <a:bodyPr wrap="square" lIns="0" tIns="0" rIns="0" bIns="0" rtlCol="0" anchor="ctr"/>
+          <a:lstStyle/>
+          <a:p>
+            <a:pPr algn="ctr" indent="0" marL="0">
+              <a:buNone/>
+            </a:pPr>
+            <a:r>
+              <a:rPr lang="en-US" sz="1400" b="1" dirty="0">
+                <a:solidFill>
+                  <a:srgbClr val="0D9488"/>
+                </a:solidFill>
+                <a:latin typeface="Trebuchet MS" pitchFamily="34" charset="0"/>
+                <a:ea typeface="Trebuchet MS" pitchFamily="34" charset="-122"/>
+                <a:cs typeface="Trebuchet MS" pitchFamily="34" charset="-120"/>
+              </a:rPr>
+              <a:t>sweet</a:t>
+            </a:r>
+            <a:endParaRPr lang="en-US" sz="1400" dirty="0"/>
+          </a:p>
+        </p:txBody>
+      </p:sp>
+      <p:sp>
+        <p:nvSpPr>
+          <p:cNvPr id="33" name="Shape 31"/>
           <p:cNvSpPr/>
           <p:nvPr/>
         </p:nvSpPr>
@@ -30640,7 +32062,7 @@
       </p:sp>
       <p:sp>
         <p:nvSpPr>
-          <p:cNvPr id="31" name="Text 29"/>
+          <p:cNvPr id="34" name="Text 32"/>
           <p:cNvSpPr/>
           <p:nvPr/>
         </p:nvSpPr>
@@ -30679,7 +32101,7 @@
       </p:sp>
       <p:sp>
         <p:nvSpPr>
-          <p:cNvPr id="32" name="Shape 30"/>
+          <p:cNvPr id="35" name="Shape 33"/>
           <p:cNvSpPr/>
           <p:nvPr/>
         </p:nvSpPr>
@@ -30706,13 +32128,13 @@
       </p:sp>
       <p:sp>
         <p:nvSpPr>
-          <p:cNvPr id="33" name="Shape 31"/>
-          <p:cNvSpPr/>
-          <p:nvPr/>
-        </p:nvSpPr>
-        <p:spPr>
-          <a:xfrm>
-            <a:off x="2254649" y="4169664"/>
+          <p:cNvPr id="36" name="Shape 34"/>
+          <p:cNvSpPr/>
+          <p:nvPr/>
+        </p:nvSpPr>
+        <p:spPr>
+          <a:xfrm>
+            <a:off x="2124837" y="4169664"/>
             <a:ext cx="685800" cy="475488"/>
           </a:xfrm>
           <a:prstGeom prst="rect">
@@ -30733,13 +32155,13 @@
       </p:sp>
       <p:sp>
         <p:nvSpPr>
-          <p:cNvPr id="34" name="Text 32"/>
-          <p:cNvSpPr/>
-          <p:nvPr/>
-        </p:nvSpPr>
-        <p:spPr>
-          <a:xfrm>
-            <a:off x="2254649" y="4169664"/>
+          <p:cNvPr id="37" name="Text 35"/>
+          <p:cNvSpPr/>
+          <p:nvPr/>
+        </p:nvSpPr>
+        <p:spPr>
+          <a:xfrm>
+            <a:off x="2124837" y="4169664"/>
             <a:ext cx="685800" cy="475488"/>
           </a:xfrm>
           <a:prstGeom prst="rect">
@@ -30764,7 +32186,7 @@
                 <a:ea typeface="Trebuchet MS" pitchFamily="34" charset="-122"/>
                 <a:cs typeface="Trebuchet MS" pitchFamily="34" charset="-120"/>
               </a:rPr>
-              <a:t>sw</a:t>
+              <a:t>b</a:t>
             </a:r>
             <a:endParaRPr lang="en-US" sz="900" dirty="0"/>
           </a:p>
@@ -30772,13 +32194,13 @@
       </p:sp>
       <p:sp>
         <p:nvSpPr>
-          <p:cNvPr id="35" name="Shape 33"/>
-          <p:cNvSpPr/>
-          <p:nvPr/>
-        </p:nvSpPr>
-        <p:spPr>
-          <a:xfrm>
-            <a:off x="3293146" y="4169664"/>
+          <p:cNvPr id="38" name="Shape 36"/>
+          <p:cNvSpPr/>
+          <p:nvPr/>
+        </p:nvSpPr>
+        <p:spPr>
+          <a:xfrm>
+            <a:off x="3033522" y="4169664"/>
             <a:ext cx="685800" cy="475488"/>
           </a:xfrm>
           <a:prstGeom prst="rect">
@@ -30799,13 +32221,13 @@
       </p:sp>
       <p:sp>
         <p:nvSpPr>
-          <p:cNvPr id="36" name="Text 34"/>
-          <p:cNvSpPr/>
-          <p:nvPr/>
-        </p:nvSpPr>
-        <p:spPr>
-          <a:xfrm>
-            <a:off x="3293146" y="4169664"/>
+          <p:cNvPr id="39" name="Text 37"/>
+          <p:cNvSpPr/>
+          <p:nvPr/>
+        </p:nvSpPr>
+        <p:spPr>
+          <a:xfrm>
+            <a:off x="3033522" y="4169664"/>
             <a:ext cx="685800" cy="475488"/>
           </a:xfrm>
           <a:prstGeom prst="rect">
@@ -30830,7 +32252,7 @@
                 <a:ea typeface="Trebuchet MS" pitchFamily="34" charset="-122"/>
                 <a:cs typeface="Trebuchet MS" pitchFamily="34" charset="-120"/>
               </a:rPr>
-              <a:t>ee</a:t>
+              <a:t>i</a:t>
             </a:r>
             <a:endParaRPr lang="en-US" sz="900" dirty="0"/>
           </a:p>
@@ -30838,13 +32260,13 @@
       </p:sp>
       <p:sp>
         <p:nvSpPr>
-          <p:cNvPr id="37" name="Shape 35"/>
-          <p:cNvSpPr/>
-          <p:nvPr/>
-        </p:nvSpPr>
-        <p:spPr>
-          <a:xfrm>
-            <a:off x="4331643" y="4169664"/>
+          <p:cNvPr id="40" name="Shape 38"/>
+          <p:cNvSpPr/>
+          <p:nvPr/>
+        </p:nvSpPr>
+        <p:spPr>
+          <a:xfrm>
+            <a:off x="3942207" y="4169664"/>
             <a:ext cx="685800" cy="475488"/>
           </a:xfrm>
           <a:prstGeom prst="rect">
@@ -30865,13 +32287,13 @@
       </p:sp>
       <p:sp>
         <p:nvSpPr>
-          <p:cNvPr id="38" name="Text 36"/>
-          <p:cNvSpPr/>
-          <p:nvPr/>
-        </p:nvSpPr>
-        <p:spPr>
-          <a:xfrm>
-            <a:off x="4331643" y="4169664"/>
+          <p:cNvPr id="41" name="Text 39"/>
+          <p:cNvSpPr/>
+          <p:nvPr/>
+        </p:nvSpPr>
+        <p:spPr>
+          <a:xfrm>
+            <a:off x="3942207" y="4169664"/>
             <a:ext cx="685800" cy="475488"/>
           </a:xfrm>
           <a:prstGeom prst="rect">
@@ -30896,7 +32318,7 @@
                 <a:ea typeface="Trebuchet MS" pitchFamily="34" charset="-122"/>
                 <a:cs typeface="Trebuchet MS" pitchFamily="34" charset="-120"/>
               </a:rPr>
-              <a:t>t</a:t>
+              <a:t>tt</a:t>
             </a:r>
             <a:endParaRPr lang="en-US" sz="900" dirty="0"/>
           </a:p>
@@ -30904,13 +32326,13 @@
       </p:sp>
       <p:sp>
         <p:nvSpPr>
-          <p:cNvPr id="39" name="Shape 37"/>
-          <p:cNvSpPr/>
-          <p:nvPr/>
-        </p:nvSpPr>
-        <p:spPr>
-          <a:xfrm>
-            <a:off x="5370141" y="4169664"/>
+          <p:cNvPr id="42" name="Shape 40"/>
+          <p:cNvSpPr/>
+          <p:nvPr/>
+        </p:nvSpPr>
+        <p:spPr>
+          <a:xfrm>
+            <a:off x="4850892" y="4169664"/>
             <a:ext cx="685800" cy="475488"/>
           </a:xfrm>
           <a:prstGeom prst="rect">
@@ -30931,13 +32353,13 @@
       </p:sp>
       <p:sp>
         <p:nvSpPr>
-          <p:cNvPr id="40" name="Text 38"/>
-          <p:cNvSpPr/>
-          <p:nvPr/>
-        </p:nvSpPr>
-        <p:spPr>
-          <a:xfrm>
-            <a:off x="5370141" y="4169664"/>
+          <p:cNvPr id="43" name="Text 41"/>
+          <p:cNvSpPr/>
+          <p:nvPr/>
+        </p:nvSpPr>
+        <p:spPr>
+          <a:xfrm>
+            <a:off x="4850892" y="4169664"/>
             <a:ext cx="685800" cy="475488"/>
           </a:xfrm>
           <a:prstGeom prst="rect">
@@ -30962,7 +32384,7 @@
                 <a:ea typeface="Trebuchet MS" pitchFamily="34" charset="-122"/>
                 <a:cs typeface="Trebuchet MS" pitchFamily="34" charset="-120"/>
               </a:rPr>
-              <a:t>h</a:t>
+              <a:t>er</a:t>
             </a:r>
             <a:endParaRPr lang="en-US" sz="900" dirty="0"/>
           </a:p>
@@ -30970,13 +32392,13 @@
       </p:sp>
       <p:sp>
         <p:nvSpPr>
-          <p:cNvPr id="41" name="Shape 39"/>
-          <p:cNvSpPr/>
-          <p:nvPr/>
-        </p:nvSpPr>
-        <p:spPr>
-          <a:xfrm>
-            <a:off x="6408638" y="4169664"/>
+          <p:cNvPr id="44" name="Shape 42"/>
+          <p:cNvSpPr/>
+          <p:nvPr/>
+        </p:nvSpPr>
+        <p:spPr>
+          <a:xfrm>
+            <a:off x="5759577" y="4169664"/>
             <a:ext cx="685800" cy="475488"/>
           </a:xfrm>
           <a:prstGeom prst="rect">
@@ -30997,13 +32419,13 @@
       </p:sp>
       <p:sp>
         <p:nvSpPr>
-          <p:cNvPr id="42" name="Text 40"/>
-          <p:cNvSpPr/>
-          <p:nvPr/>
-        </p:nvSpPr>
-        <p:spPr>
-          <a:xfrm>
-            <a:off x="6408638" y="4169664"/>
+          <p:cNvPr id="45" name="Text 43"/>
+          <p:cNvSpPr/>
+          <p:nvPr/>
+        </p:nvSpPr>
+        <p:spPr>
+          <a:xfrm>
+            <a:off x="5759577" y="4169664"/>
             <a:ext cx="685800" cy="475488"/>
           </a:xfrm>
           <a:prstGeom prst="rect">
@@ -31028,7 +32450,7 @@
                 <a:ea typeface="Trebuchet MS" pitchFamily="34" charset="-122"/>
                 <a:cs typeface="Trebuchet MS" pitchFamily="34" charset="-120"/>
               </a:rPr>
-              <a:t>ar</a:t>
+              <a:t>sw</a:t>
             </a:r>
             <a:endParaRPr lang="en-US" sz="900" dirty="0"/>
           </a:p>
@@ -31036,13 +32458,13 @@
       </p:sp>
       <p:sp>
         <p:nvSpPr>
-          <p:cNvPr id="43" name="Shape 41"/>
-          <p:cNvSpPr/>
-          <p:nvPr/>
-        </p:nvSpPr>
-        <p:spPr>
-          <a:xfrm>
-            <a:off x="7447135" y="4169664"/>
+          <p:cNvPr id="46" name="Shape 44"/>
+          <p:cNvSpPr/>
+          <p:nvPr/>
+        </p:nvSpPr>
+        <p:spPr>
+          <a:xfrm>
+            <a:off x="6668262" y="4169664"/>
             <a:ext cx="685800" cy="475488"/>
           </a:xfrm>
           <a:prstGeom prst="rect">
@@ -31063,13 +32485,79 @@
       </p:sp>
       <p:sp>
         <p:nvSpPr>
-          <p:cNvPr id="44" name="Text 42"/>
-          <p:cNvSpPr/>
-          <p:nvPr/>
-        </p:nvSpPr>
-        <p:spPr>
-          <a:xfrm>
-            <a:off x="7447135" y="4169664"/>
+          <p:cNvPr id="47" name="Text 45"/>
+          <p:cNvSpPr/>
+          <p:nvPr/>
+        </p:nvSpPr>
+        <p:spPr>
+          <a:xfrm>
+            <a:off x="6668262" y="4169664"/>
+            <a:ext cx="685800" cy="475488"/>
+          </a:xfrm>
+          <a:prstGeom prst="rect">
+            <a:avLst/>
+          </a:prstGeom>
+          <a:noFill/>
+          <a:ln/>
+        </p:spPr>
+        <p:txBody>
+          <a:bodyPr wrap="square" lIns="0" tIns="0" rIns="0" bIns="0" rtlCol="0" anchor="ctr"/>
+          <a:lstStyle/>
+          <a:p>
+            <a:pPr algn="ctr" indent="0" marL="0">
+              <a:buNone/>
+            </a:pPr>
+            <a:r>
+              <a:rPr lang="en-US" sz="900" b="1" dirty="0">
+                <a:solidFill>
+                  <a:srgbClr val="9D174D"/>
+                </a:solidFill>
+                <a:latin typeface="Trebuchet MS" pitchFamily="34" charset="0"/>
+                <a:ea typeface="Trebuchet MS" pitchFamily="34" charset="-122"/>
+                <a:cs typeface="Trebuchet MS" pitchFamily="34" charset="-120"/>
+              </a:rPr>
+              <a:t>ee</a:t>
+            </a:r>
+            <a:endParaRPr lang="en-US" sz="900" dirty="0"/>
+          </a:p>
+        </p:txBody>
+      </p:sp>
+      <p:sp>
+        <p:nvSpPr>
+          <p:cNvPr id="48" name="Shape 46"/>
+          <p:cNvSpPr/>
+          <p:nvPr/>
+        </p:nvSpPr>
+        <p:spPr>
+          <a:xfrm>
+            <a:off x="7576947" y="4169664"/>
+            <a:ext cx="685800" cy="475488"/>
+          </a:xfrm>
+          <a:prstGeom prst="rect">
+            <a:avLst>
+              <a:gd name="adj" fmla="val 7692"/>
+            </a:avLst>
+          </a:prstGeom>
+          <a:solidFill>
+            <a:srgbClr val="FFFFFF"/>
+          </a:solidFill>
+          <a:ln w="12700">
+            <a:solidFill>
+              <a:srgbClr val="DB2777"/>
+            </a:solidFill>
+            <a:prstDash val="solid"/>
+          </a:ln>
+        </p:spPr>
+      </p:sp>
+      <p:sp>
+        <p:nvSpPr>
+          <p:cNvPr id="49" name="Text 47"/>
+          <p:cNvSpPr/>
+          <p:nvPr/>
+        </p:nvSpPr>
+        <p:spPr>
+          <a:xfrm>
+            <a:off x="7576947" y="4169664"/>
             <a:ext cx="685800" cy="475488"/>
           </a:xfrm>
           <a:prstGeom prst="rect">
@@ -31386,7 +32874,7 @@
                 <a:ea typeface="Calibri" pitchFamily="34" charset="-122"/>
                 <a:cs typeface="Calibri" pitchFamily="34" charset="-120"/>
               </a:rPr>
-              <a:t>Word Labs  •  wordlabs.app  •  Root: 'sweet' = having a pleasant sugary taste</a:t>
+              <a:t>Word Labs  •  wordlabs.app  •  Root: 'sweet' = pleasant sugary taste or smell</a:t>
             </a:r>
             <a:endParaRPr lang="en-US" sz="800" dirty="0"/>
           </a:p>
@@ -32555,7 +34043,7 @@
                 <a:ea typeface="Calibri" pitchFamily="34" charset="-122"/>
                 <a:cs typeface="Calibri" pitchFamily="34" charset="-120"/>
               </a:rPr>
-              <a:t>Word Labs  •  wordlabs.app  •  Root: 'sweet' = having a pleasant sugary taste</a:t>
+              <a:t>Word Labs  •  wordlabs.app  •  Root: 'sweet' = pleasant sugary taste or smell</a:t>
             </a:r>
             <a:endParaRPr lang="en-US" sz="800" dirty="0"/>
           </a:p>
@@ -33048,7 +34536,7 @@
                 <a:ea typeface="Trebuchet MS" pitchFamily="34" charset="-122"/>
                 <a:cs typeface="Trebuchet MS" pitchFamily="34" charset="-120"/>
               </a:rPr>
-              <a:t>semi-</a:t>
+              <a:t>over-</a:t>
             </a:r>
             <a:endParaRPr lang="en-US" sz="1300" dirty="0"/>
           </a:p>
@@ -33201,7 +34689,7 @@
                 <a:ea typeface="Trebuchet MS" pitchFamily="34" charset="-122"/>
                 <a:cs typeface="Trebuchet MS" pitchFamily="34" charset="-120"/>
               </a:rPr>
-              <a:t>over-</a:t>
+              <a:t>semi-</a:t>
             </a:r>
             <a:endParaRPr lang="en-US" sz="1300" dirty="0"/>
           </a:p>
@@ -33354,7 +34842,7 @@
                 <a:ea typeface="Trebuchet MS" pitchFamily="34" charset="-122"/>
                 <a:cs typeface="Trebuchet MS" pitchFamily="34" charset="-120"/>
               </a:rPr>
-              <a:t>bitter-</a:t>
+              <a:t>extra-</a:t>
             </a:r>
             <a:endParaRPr lang="en-US" sz="1300" dirty="0"/>
           </a:p>
@@ -33507,7 +34995,7 @@
                 <a:ea typeface="Trebuchet MS" pitchFamily="34" charset="-122"/>
                 <a:cs typeface="Trebuchet MS" pitchFamily="34" charset="-120"/>
               </a:rPr>
-              <a:t>home-</a:t>
+              <a:t>honey-</a:t>
             </a:r>
             <a:endParaRPr lang="en-US" sz="1300" dirty="0"/>
           </a:p>
@@ -34031,7 +35519,7 @@
                 <a:ea typeface="Trebuchet MS" pitchFamily="34" charset="-122"/>
                 <a:cs typeface="Trebuchet MS" pitchFamily="34" charset="-120"/>
               </a:rPr>
-              <a:t>bittersweet</a:t>
+              <a:t>unsweetened</a:t>
             </a:r>
             <a:endParaRPr lang="en-US" sz="1200" dirty="0"/>
           </a:p>
@@ -34097,7 +35585,7 @@
                 <a:ea typeface="Trebuchet MS" pitchFamily="34" charset="-122"/>
                 <a:cs typeface="Trebuchet MS" pitchFamily="34" charset="-120"/>
               </a:rPr>
-              <a:t>unsweetened</a:t>
+              <a:t>bittersweet</a:t>
             </a:r>
             <a:endParaRPr lang="en-US" sz="1200" dirty="0"/>
           </a:p>
@@ -34163,7 +35651,7 @@
                 <a:ea typeface="Trebuchet MS" pitchFamily="34" charset="-122"/>
                 <a:cs typeface="Trebuchet MS" pitchFamily="34" charset="-120"/>
               </a:rPr>
-              <a:t>homesweetness</a:t>
+              <a:t>sweetener</a:t>
             </a:r>
             <a:endParaRPr lang="en-US" sz="1200" dirty="0"/>
           </a:p>
@@ -34455,7 +35943,7 @@
                 <a:ea typeface="Calibri" pitchFamily="34" charset="-122"/>
                 <a:cs typeface="Calibri" pitchFamily="34" charset="-120"/>
               </a:rPr>
-              <a:t>Word Labs  •  wordlabs.app  •  Root: 'sweet' = having a pleasant sugary taste</a:t>
+              <a:t>Word Labs  •  wordlabs.app  •  Root: 'sweet' = pleasant sugary taste or smell</a:t>
             </a:r>
             <a:endParaRPr lang="en-US" sz="800" dirty="0"/>
           </a:p>
@@ -34619,7 +36107,7 @@
                 <a:ea typeface="Calibri" pitchFamily="34" charset="-122"/>
                 <a:cs typeface="Calibri" pitchFamily="34" charset="-120"/>
               </a:rPr>
-              <a:t>The core part of a word carrying its basic meaning. For example, 'sweet' means 'having a pleasant sugary taste'.</a:t>
+              <a:t>The core part of a word carrying its basic meaning. For example, 'sweet' means 'pleasant sugary taste or smell'.</a:t>
             </a:r>
             <a:endParaRPr lang="en-US" sz="1350" dirty="0"/>
           </a:p>
@@ -35239,7 +36727,7 @@
                 <a:ea typeface="Calibri" pitchFamily="34" charset="-122"/>
                 <a:cs typeface="Calibri" pitchFamily="34" charset="-120"/>
               </a:rPr>
-              <a:t>Word Labs  •  wordlabs.app  •  Root: 'sweet' = having a pleasant sugary taste</a:t>
+              <a:t>Word Labs  •  wordlabs.app  •  Root: 'sweet' = pleasant sugary taste or smell</a:t>
             </a:r>
             <a:endParaRPr lang="en-US" sz="800" dirty="0"/>
           </a:p>
@@ -35351,7 +36839,7 @@
                 <a:ea typeface="Calibri" pitchFamily="34" charset="-122"/>
                 <a:cs typeface="Calibri" pitchFamily="34" charset="-120"/>
               </a:rPr>
-              <a:t>1.  The word 'sweetly' contains the root 'sweet' and the suffix '-ly' meaning in a certain way.</a:t>
+              <a:t>1.  'Sweetheart' is a compound word that contains the root 'sweet'.</a:t>
             </a:r>
             <a:endParaRPr lang="en-US" sz="1300" dirty="0"/>
           </a:p>
@@ -35490,7 +36978,7 @@
                 <a:ea typeface="Calibri" pitchFamily="34" charset="-122"/>
                 <a:cs typeface="Calibri" pitchFamily="34" charset="-120"/>
               </a:rPr>
-              <a:t>2.  The root 'sweet' comes from a Greek word.</a:t>
+              <a:t>2.  The word 'bittersweet' describes something that has both happy and sad feelings.</a:t>
             </a:r>
             <a:endParaRPr lang="en-US" sz="1300" dirty="0"/>
           </a:p>
@@ -35513,11 +37001,11 @@
             </a:avLst>
           </a:prstGeom>
           <a:solidFill>
-            <a:srgbClr val="FEE2E2"/>
-          </a:solidFill>
-          <a:ln w="12700">
-            <a:solidFill>
-              <a:srgbClr val="DC2626"/>
+            <a:srgbClr val="DCFCE7"/>
+          </a:solidFill>
+          <a:ln w="12700">
+            <a:solidFill>
+              <a:srgbClr val="16A34A"/>
             </a:solidFill>
             <a:prstDash val="solid"/>
           </a:ln>
@@ -35550,13 +37038,13 @@
             <a:r>
               <a:rPr lang="en-US" sz="1100" b="1" dirty="0">
                 <a:solidFill>
-                  <a:srgbClr val="DC2626"/>
+                  <a:srgbClr val="16A34A"/>
                 </a:solidFill>
                 <a:latin typeface="Trebuchet MS" pitchFamily="34" charset="0"/>
                 <a:ea typeface="Trebuchet MS" pitchFamily="34" charset="-122"/>
                 <a:cs typeface="Trebuchet MS" pitchFamily="34" charset="-120"/>
               </a:rPr>
-              <a:t>FALSE</a:t>
+              <a:t>TRUE</a:t>
             </a:r>
             <a:endParaRPr lang="en-US" sz="1100" dirty="0"/>
           </a:p>
@@ -35629,7 +37117,7 @@
                 <a:ea typeface="Calibri" pitchFamily="34" charset="-122"/>
                 <a:cs typeface="Calibri" pitchFamily="34" charset="-120"/>
               </a:rPr>
-              <a:t>3.  Adding the suffix '-ness' to 'sweet' makes a noun that means the quality of being sweet.</a:t>
+              <a:t>3.  The word 'sweetly' contains the root 'sweet' plus the suffix '-ly'.</a:t>
             </a:r>
             <a:endParaRPr lang="en-US" sz="1300" dirty="0"/>
           </a:p>
@@ -35768,7 +37256,7 @@
                 <a:ea typeface="Calibri" pitchFamily="34" charset="-122"/>
                 <a:cs typeface="Calibri" pitchFamily="34" charset="-120"/>
               </a:rPr>
-              <a:t>4.  The word 'bittersweet' means something that is both happy and a little sad.</a:t>
+              <a:t>4.  The word 'unsweetened' means something that has been made extra sweet.</a:t>
             </a:r>
             <a:endParaRPr lang="en-US" sz="1300" dirty="0"/>
           </a:p>
@@ -35791,11 +37279,11 @@
             </a:avLst>
           </a:prstGeom>
           <a:solidFill>
-            <a:srgbClr val="DCFCE7"/>
-          </a:solidFill>
-          <a:ln w="12700">
-            <a:solidFill>
-              <a:srgbClr val="16A34A"/>
+            <a:srgbClr val="FEE2E2"/>
+          </a:solidFill>
+          <a:ln w="12700">
+            <a:solidFill>
+              <a:srgbClr val="DC2626"/>
             </a:solidFill>
             <a:prstDash val="solid"/>
           </a:ln>
@@ -35828,13 +37316,13 @@
             <a:r>
               <a:rPr lang="en-US" sz="1100" b="1" dirty="0">
                 <a:solidFill>
-                  <a:srgbClr val="16A34A"/>
+                  <a:srgbClr val="DC2626"/>
                 </a:solidFill>
                 <a:latin typeface="Trebuchet MS" pitchFamily="34" charset="0"/>
                 <a:ea typeface="Trebuchet MS" pitchFamily="34" charset="-122"/>
                 <a:cs typeface="Trebuchet MS" pitchFamily="34" charset="-120"/>
               </a:rPr>
-              <a:t>TRUE</a:t>
+              <a:t>FALSE</a:t>
             </a:r>
             <a:endParaRPr lang="en-US" sz="1100" dirty="0"/>
           </a:p>
@@ -35907,7 +37395,7 @@
                 <a:ea typeface="Calibri" pitchFamily="34" charset="-122"/>
                 <a:cs typeface="Calibri" pitchFamily="34" charset="-120"/>
               </a:rPr>
-              <a:t>5.  The prefix 'un-' in 'unsweetened' means again or more.</a:t>
+              <a:t>5.  The root 'sweet' comes from the Greek language.</a:t>
             </a:r>
             <a:endParaRPr lang="en-US" sz="1300" dirty="0"/>
           </a:p>
@@ -36265,7 +37753,7 @@
                 <a:ea typeface="Calibri" pitchFamily="34" charset="-122"/>
                 <a:cs typeface="Calibri" pitchFamily="34" charset="-120"/>
               </a:rPr>
-              <a:t>Word Labs  •  wordlabs.app  •  Root: 'sweet' = having a pleasant sugary taste</a:t>
+              <a:t>Word Labs  •  wordlabs.app  •  Root: 'sweet' = pleasant sugary taste or smell</a:t>
             </a:r>
             <a:endParaRPr lang="en-US" sz="800" dirty="0"/>
           </a:p>
@@ -36402,7 +37890,7 @@
                 <a:ea typeface="Trebuchet MS" pitchFamily="34" charset="-122"/>
                 <a:cs typeface="Trebuchet MS" pitchFamily="34" charset="-120"/>
               </a:rPr>
-              <a:t>having a pleasant sugary taste</a:t>
+              <a:t>pleasant sugary taste or smell</a:t>
             </a:r>
             <a:endParaRPr lang="en-US" sz="2000" dirty="0"/>
           </a:p>
@@ -36876,7 +38364,7 @@
                 <a:ea typeface="Trebuchet MS" pitchFamily="34" charset="-122"/>
                 <a:cs typeface="Trebuchet MS" pitchFamily="34" charset="-120"/>
               </a:rPr>
-              <a:t>bittersweet</a:t>
+              <a:t>unsweetened</a:t>
             </a:r>
             <a:endParaRPr lang="en-US" sz="1300" dirty="0"/>
           </a:p>
@@ -36942,7 +38430,7 @@
                 <a:ea typeface="Trebuchet MS" pitchFamily="34" charset="-122"/>
                 <a:cs typeface="Trebuchet MS" pitchFamily="34" charset="-120"/>
               </a:rPr>
-              <a:t>unsweetened</a:t>
+              <a:t>bittersweet</a:t>
             </a:r>
             <a:endParaRPr lang="en-US" sz="1300" dirty="0"/>
           </a:p>
@@ -37234,7 +38722,7 @@
                 <a:ea typeface="Calibri" pitchFamily="34" charset="-122"/>
                 <a:cs typeface="Calibri" pitchFamily="34" charset="-120"/>
               </a:rPr>
-              <a:t>Word Labs  •  wordlabs.app  •  Root: 'sweet' = having a pleasant sugary taste</a:t>
+              <a:t>Word Labs  •  wordlabs.app  •  Root: 'sweet' = pleasant sugary taste or smell</a:t>
             </a:r>
             <a:endParaRPr lang="en-US" sz="800" dirty="0"/>
           </a:p>
@@ -37727,7 +39215,7 @@
                 <a:ea typeface="Trebuchet MS" pitchFamily="34" charset="-122"/>
                 <a:cs typeface="Trebuchet MS" pitchFamily="34" charset="-120"/>
               </a:rPr>
-              <a:t>semi-</a:t>
+              <a:t>over-</a:t>
             </a:r>
             <a:endParaRPr lang="en-US" sz="1300" dirty="0"/>
           </a:p>
@@ -37880,7 +39368,7 @@
                 <a:ea typeface="Trebuchet MS" pitchFamily="34" charset="-122"/>
                 <a:cs typeface="Trebuchet MS" pitchFamily="34" charset="-120"/>
               </a:rPr>
-              <a:t>over-</a:t>
+              <a:t>semi-</a:t>
             </a:r>
             <a:endParaRPr lang="en-US" sz="1300" dirty="0"/>
           </a:p>
@@ -38033,7 +39521,7 @@
                 <a:ea typeface="Trebuchet MS" pitchFamily="34" charset="-122"/>
                 <a:cs typeface="Trebuchet MS" pitchFamily="34" charset="-120"/>
               </a:rPr>
-              <a:t>bitter-</a:t>
+              <a:t>extra-</a:t>
             </a:r>
             <a:endParaRPr lang="en-US" sz="1300" dirty="0"/>
           </a:p>
@@ -38186,7 +39674,7 @@
                 <a:ea typeface="Trebuchet MS" pitchFamily="34" charset="-122"/>
                 <a:cs typeface="Trebuchet MS" pitchFamily="34" charset="-120"/>
               </a:rPr>
-              <a:t>home-</a:t>
+              <a:t>honey-</a:t>
             </a:r>
             <a:endParaRPr lang="en-US" sz="1300" dirty="0"/>
           </a:p>
@@ -39008,7 +40496,7 @@
                 <a:ea typeface="Calibri" pitchFamily="34" charset="-122"/>
                 <a:cs typeface="Calibri" pitchFamily="34" charset="-120"/>
               </a:rPr>
-              <a:t>Word Labs  •  wordlabs.app  •  Root: 'sweet' = having a pleasant sugary taste</a:t>
+              <a:t>Word Labs  •  wordlabs.app  •  Root: 'sweet' = pleasant sugary taste or smell</a:t>
             </a:r>
             <a:endParaRPr lang="en-US" sz="800" dirty="0"/>
           </a:p>
@@ -39186,7 +40674,7 @@
                 <a:ea typeface="Calibri" pitchFamily="34" charset="-122"/>
                 <a:cs typeface="Calibri" pitchFamily="34" charset="-120"/>
               </a:rPr>
-              <a:t>A food or drink that has no sugar added to it, like plain yoghurt.</a:t>
+              <a:t>Something that is both happy and sad at the same time.</a:t>
             </a:r>
             <a:endParaRPr lang="en-US" sz="1200" dirty="0"/>
           </a:p>
@@ -39325,7 +40813,7 @@
                 <a:ea typeface="Calibri" pitchFamily="34" charset="-122"/>
                 <a:cs typeface="Calibri" pitchFamily="34" charset="-120"/>
               </a:rPr>
-              <a:t>A kind, lovable person, or someone you care about very much.</a:t>
+              <a:t>A name you call someone you love very much.</a:t>
             </a:r>
             <a:endParaRPr lang="en-US" sz="1200" dirty="0"/>
           </a:p>
@@ -39464,7 +40952,7 @@
                 <a:ea typeface="Calibri" pitchFamily="34" charset="-122"/>
                 <a:cs typeface="Calibri" pitchFamily="34" charset="-120"/>
               </a:rPr>
-              <a:t>The most sweet of all, like saying this cake is the sweetest I've ever tasted.</a:t>
+              <a:t>The most sweet of all things being compared.</a:t>
             </a:r>
             <a:endParaRPr lang="en-US" sz="1200" dirty="0"/>
           </a:p>
@@ -39603,7 +41091,7 @@
                 <a:ea typeface="Calibri" pitchFamily="34" charset="-122"/>
                 <a:cs typeface="Calibri" pitchFamily="34" charset="-120"/>
               </a:rPr>
-              <a:t>Something that is both a little sad and a little happy at the same time, like finishing a great book.</a:t>
+              <a:t>Food or drink that has had no sugar added to it.</a:t>
             </a:r>
             <a:endParaRPr lang="en-US" sz="1200" dirty="0"/>
           </a:p>
@@ -39742,7 +41230,7 @@
                 <a:ea typeface="Calibri" pitchFamily="34" charset="-122"/>
                 <a:cs typeface="Calibri" pitchFamily="34" charset="-120"/>
               </a:rPr>
-              <a:t>More sweet than something else, like comparing two lollies.</a:t>
+              <a:t>More sweet than something else.</a:t>
             </a:r>
             <a:endParaRPr lang="en-US" sz="1200" dirty="0"/>
           </a:p>
@@ -39815,7 +41303,7 @@
                 <a:ea typeface="Trebuchet MS" pitchFamily="34" charset="-122"/>
                 <a:cs typeface="Trebuchet MS" pitchFamily="34" charset="-120"/>
               </a:rPr>
-              <a:t>bittersweet</a:t>
+              <a:t>unsweetened</a:t>
             </a:r>
             <a:endParaRPr lang="en-US" sz="1200" dirty="0"/>
           </a:p>
@@ -39954,7 +41442,7 @@
                 <a:ea typeface="Trebuchet MS" pitchFamily="34" charset="-122"/>
                 <a:cs typeface="Trebuchet MS" pitchFamily="34" charset="-120"/>
               </a:rPr>
-              <a:t>unsweetened</a:t>
+              <a:t>bittersweet</a:t>
             </a:r>
             <a:endParaRPr lang="en-US" sz="1200" dirty="0"/>
           </a:p>
@@ -40020,7 +41508,7 @@
                 <a:ea typeface="Calibri" pitchFamily="34" charset="-122"/>
                 <a:cs typeface="Calibri" pitchFamily="34" charset="-120"/>
               </a:rPr>
-              <a:t>Done in a sweet or pleasant way, like smiling sweetly at someone.</a:t>
+              <a:t>Done in a sweet or pleasant way, like singing sweetly.</a:t>
             </a:r>
             <a:endParaRPr lang="en-US" sz="1200" dirty="0"/>
           </a:p>
@@ -40312,7 +41800,7 @@
                 <a:ea typeface="Calibri" pitchFamily="34" charset="-122"/>
                 <a:cs typeface="Calibri" pitchFamily="34" charset="-120"/>
               </a:rPr>
-              <a:t>Word Labs  •  wordlabs.app  •  Root: 'sweet' = having a pleasant sugary taste</a:t>
+              <a:t>Word Labs  •  wordlabs.app  •  Root: 'sweet' = pleasant sugary taste or smell</a:t>
             </a:r>
             <a:endParaRPr lang="en-US" sz="800" dirty="0"/>
           </a:p>
@@ -40515,7 +42003,7 @@
                 <a:ea typeface="Calibri" pitchFamily="34" charset="-122"/>
                 <a:cs typeface="Calibri" pitchFamily="34" charset="-120"/>
               </a:rPr>
-              <a:t>The baker added extra honey to make the biscuits even sweeter for the school fete.</a:t>
+              <a:t>The baker added a sweetener to the lemon cake so it wouldn't taste too sour.</a:t>
             </a:r>
             <a:endParaRPr lang="en-US" sz="1500" dirty="0"/>
           </a:p>
@@ -40843,7 +42331,7 @@
                 <a:ea typeface="Calibri" pitchFamily="34" charset="-122"/>
                 <a:cs typeface="Calibri" pitchFamily="34" charset="-120"/>
               </a:rPr>
-              <a:t>The sweetness of the ripe mango filled the whole kitchen with a lovely smell.</a:t>
+              <a:t>The bittersweet ending of the story made some students feel happy and sad at the same time.</a:t>
             </a:r>
             <a:endParaRPr lang="en-US" sz="1500" dirty="0"/>
           </a:p>

--- a/output/wordlabs-sweet-3day.pptx
+++ b/output/wordlabs-sweet-3day.pptx
@@ -22517,7 +22517,7 @@
                 <a:ea typeface="Trebuchet MS" pitchFamily="34" charset="-122"/>
                 <a:cs typeface="Trebuchet MS" pitchFamily="34" charset="-120"/>
               </a:rPr>
-              <a:t>sw</a:t>
+              <a:t>s</a:t>
             </a:r>
             <a:endParaRPr lang="en-US" sz="900" dirty="0"/>
           </a:p>
@@ -22583,7 +22583,7 @@
                 <a:ea typeface="Trebuchet MS" pitchFamily="34" charset="-122"/>
                 <a:cs typeface="Trebuchet MS" pitchFamily="34" charset="-120"/>
               </a:rPr>
-              <a:t>ee</a:t>
+              <a:t>w</a:t>
             </a:r>
             <a:endParaRPr lang="en-US" sz="900" dirty="0"/>
           </a:p>
@@ -22649,7 +22649,7 @@
                 <a:ea typeface="Trebuchet MS" pitchFamily="34" charset="-122"/>
                 <a:cs typeface="Trebuchet MS" pitchFamily="34" charset="-120"/>
               </a:rPr>
-              <a:t>t</a:t>
+              <a:t>ee</a:t>
             </a:r>
             <a:endParaRPr lang="en-US" sz="900" dirty="0"/>
           </a:p>
@@ -22715,7 +22715,7 @@
                 <a:ea typeface="Trebuchet MS" pitchFamily="34" charset="-122"/>
                 <a:cs typeface="Trebuchet MS" pitchFamily="34" charset="-120"/>
               </a:rPr>
-              <a:t>h</a:t>
+              <a:t>th</a:t>
             </a:r>
             <a:endParaRPr lang="en-US" sz="900" dirty="0"/>
           </a:p>
@@ -22781,7 +22781,7 @@
                 <a:ea typeface="Trebuchet MS" pitchFamily="34" charset="-122"/>
                 <a:cs typeface="Trebuchet MS" pitchFamily="34" charset="-120"/>
               </a:rPr>
-              <a:t>ar</a:t>
+              <a:t>ear</a:t>
             </a:r>
             <a:endParaRPr lang="en-US" sz="900" dirty="0"/>
           </a:p>
@@ -27587,7 +27587,7 @@
         </p:nvSpPr>
         <p:spPr>
           <a:xfrm>
-            <a:off x="2427732" y="4169664"/>
+            <a:off x="2254649" y="4169664"/>
             <a:ext cx="685800" cy="475488"/>
           </a:xfrm>
           <a:prstGeom prst="rect">
@@ -27614,7 +27614,7 @@
         </p:nvSpPr>
         <p:spPr>
           <a:xfrm>
-            <a:off x="2427732" y="4169664"/>
+            <a:off x="2254649" y="4169664"/>
             <a:ext cx="685800" cy="475488"/>
           </a:xfrm>
           <a:prstGeom prst="rect">
@@ -27639,7 +27639,7 @@
                 <a:ea typeface="Trebuchet MS" pitchFamily="34" charset="-122"/>
                 <a:cs typeface="Trebuchet MS" pitchFamily="34" charset="-120"/>
               </a:rPr>
-              <a:t>sw</a:t>
+              <a:t>s</a:t>
             </a:r>
             <a:endParaRPr lang="en-US" sz="900" dirty="0"/>
           </a:p>
@@ -27653,7 +27653,7 @@
         </p:nvSpPr>
         <p:spPr>
           <a:xfrm>
-            <a:off x="3639312" y="4169664"/>
+            <a:off x="3293146" y="4169664"/>
             <a:ext cx="685800" cy="475488"/>
           </a:xfrm>
           <a:prstGeom prst="rect">
@@ -27680,7 +27680,7 @@
         </p:nvSpPr>
         <p:spPr>
           <a:xfrm>
-            <a:off x="3639312" y="4169664"/>
+            <a:off x="3293146" y="4169664"/>
             <a:ext cx="685800" cy="475488"/>
           </a:xfrm>
           <a:prstGeom prst="rect">
@@ -27705,7 +27705,7 @@
                 <a:ea typeface="Trebuchet MS" pitchFamily="34" charset="-122"/>
                 <a:cs typeface="Trebuchet MS" pitchFamily="34" charset="-120"/>
               </a:rPr>
-              <a:t>ee</a:t>
+              <a:t>w</a:t>
             </a:r>
             <a:endParaRPr lang="en-US" sz="900" dirty="0"/>
           </a:p>
@@ -27719,7 +27719,7 @@
         </p:nvSpPr>
         <p:spPr>
           <a:xfrm>
-            <a:off x="4850892" y="4169664"/>
+            <a:off x="4331643" y="4169664"/>
             <a:ext cx="685800" cy="475488"/>
           </a:xfrm>
           <a:prstGeom prst="rect">
@@ -27746,7 +27746,7 @@
         </p:nvSpPr>
         <p:spPr>
           <a:xfrm>
-            <a:off x="4850892" y="4169664"/>
+            <a:off x="4331643" y="4169664"/>
             <a:ext cx="685800" cy="475488"/>
           </a:xfrm>
           <a:prstGeom prst="rect">
@@ -27771,7 +27771,7 @@
                 <a:ea typeface="Trebuchet MS" pitchFamily="34" charset="-122"/>
                 <a:cs typeface="Trebuchet MS" pitchFamily="34" charset="-120"/>
               </a:rPr>
-              <a:t>t</a:t>
+              <a:t>ee</a:t>
             </a:r>
             <a:endParaRPr lang="en-US" sz="900" dirty="0"/>
           </a:p>
@@ -27785,7 +27785,7 @@
         </p:nvSpPr>
         <p:spPr>
           <a:xfrm>
-            <a:off x="6062472" y="4169664"/>
+            <a:off x="5370141" y="4169664"/>
             <a:ext cx="685800" cy="475488"/>
           </a:xfrm>
           <a:prstGeom prst="rect">
@@ -27812,7 +27812,7 @@
         </p:nvSpPr>
         <p:spPr>
           <a:xfrm>
-            <a:off x="6062472" y="4169664"/>
+            <a:off x="5370141" y="4169664"/>
             <a:ext cx="685800" cy="475488"/>
           </a:xfrm>
           <a:prstGeom prst="rect">
@@ -27837,7 +27837,7 @@
                 <a:ea typeface="Trebuchet MS" pitchFamily="34" charset="-122"/>
                 <a:cs typeface="Trebuchet MS" pitchFamily="34" charset="-120"/>
               </a:rPr>
-              <a:t>l</a:t>
+              <a:t>t</a:t>
             </a:r>
             <a:endParaRPr lang="en-US" sz="900" dirty="0"/>
           </a:p>
@@ -27851,7 +27851,7 @@
         </p:nvSpPr>
         <p:spPr>
           <a:xfrm>
-            <a:off x="7274052" y="4169664"/>
+            <a:off x="6408638" y="4169664"/>
             <a:ext cx="685800" cy="475488"/>
           </a:xfrm>
           <a:prstGeom prst="rect">
@@ -27878,7 +27878,7 @@
         </p:nvSpPr>
         <p:spPr>
           <a:xfrm>
-            <a:off x="7274052" y="4169664"/>
+            <a:off x="6408638" y="4169664"/>
             <a:ext cx="685800" cy="475488"/>
           </a:xfrm>
           <a:prstGeom prst="rect">
@@ -27903,7 +27903,73 @@
                 <a:ea typeface="Trebuchet MS" pitchFamily="34" charset="-122"/>
                 <a:cs typeface="Trebuchet MS" pitchFamily="34" charset="-120"/>
               </a:rPr>
-              <a:t>ee</a:t>
+              <a:t>l</a:t>
+            </a:r>
+            <a:endParaRPr lang="en-US" sz="900" dirty="0"/>
+          </a:p>
+        </p:txBody>
+      </p:sp>
+      <p:sp>
+        <p:nvSpPr>
+          <p:cNvPr id="43" name="Shape 41"/>
+          <p:cNvSpPr/>
+          <p:nvPr/>
+        </p:nvSpPr>
+        <p:spPr>
+          <a:xfrm>
+            <a:off x="7447135" y="4169664"/>
+            <a:ext cx="685800" cy="475488"/>
+          </a:xfrm>
+          <a:prstGeom prst="rect">
+            <a:avLst>
+              <a:gd name="adj" fmla="val 7692"/>
+            </a:avLst>
+          </a:prstGeom>
+          <a:solidFill>
+            <a:srgbClr val="FFFFFF"/>
+          </a:solidFill>
+          <a:ln w="12700">
+            <a:solidFill>
+              <a:srgbClr val="DB2777"/>
+            </a:solidFill>
+            <a:prstDash val="solid"/>
+          </a:ln>
+        </p:spPr>
+      </p:sp>
+      <p:sp>
+        <p:nvSpPr>
+          <p:cNvPr id="44" name="Text 42"/>
+          <p:cNvSpPr/>
+          <p:nvPr/>
+        </p:nvSpPr>
+        <p:spPr>
+          <a:xfrm>
+            <a:off x="7447135" y="4169664"/>
+            <a:ext cx="685800" cy="475488"/>
+          </a:xfrm>
+          <a:prstGeom prst="rect">
+            <a:avLst/>
+          </a:prstGeom>
+          <a:noFill/>
+          <a:ln/>
+        </p:spPr>
+        <p:txBody>
+          <a:bodyPr wrap="square" lIns="0" tIns="0" rIns="0" bIns="0" rtlCol="0" anchor="ctr"/>
+          <a:lstStyle/>
+          <a:p>
+            <a:pPr algn="ctr" indent="0" marL="0">
+              <a:buNone/>
+            </a:pPr>
+            <a:r>
+              <a:rPr lang="en-US" sz="900" b="1" dirty="0">
+                <a:solidFill>
+                  <a:srgbClr val="9D174D"/>
+                </a:solidFill>
+                <a:latin typeface="Trebuchet MS" pitchFamily="34" charset="0"/>
+                <a:ea typeface="Trebuchet MS" pitchFamily="34" charset="-122"/>
+                <a:cs typeface="Trebuchet MS" pitchFamily="34" charset="-120"/>
+              </a:rPr>
+              <a:t>y</a:t>
             </a:r>
             <a:endParaRPr lang="en-US" sz="900" dirty="0"/>
           </a:p>
@@ -36839,7 +36905,7 @@
                 <a:ea typeface="Calibri" pitchFamily="34" charset="-122"/>
                 <a:cs typeface="Calibri" pitchFamily="34" charset="-120"/>
               </a:rPr>
-              <a:t>1.  'Sweetheart' is a compound word that contains the root 'sweet'.</a:t>
+              <a:t>1.  The word 'bittersweet' describes something that has both happy and sad feelings.</a:t>
             </a:r>
             <a:endParaRPr lang="en-US" sz="1300" dirty="0"/>
           </a:p>
@@ -36978,7 +37044,7 @@
                 <a:ea typeface="Calibri" pitchFamily="34" charset="-122"/>
                 <a:cs typeface="Calibri" pitchFamily="34" charset="-120"/>
               </a:rPr>
-              <a:t>2.  The word 'bittersweet' describes something that has both happy and sad feelings.</a:t>
+              <a:t>2.  The word 'unsweetened' means something that has been made extra sweet.</a:t>
             </a:r>
             <a:endParaRPr lang="en-US" sz="1300" dirty="0"/>
           </a:p>
@@ -37001,11 +37067,11 @@
             </a:avLst>
           </a:prstGeom>
           <a:solidFill>
-            <a:srgbClr val="DCFCE7"/>
-          </a:solidFill>
-          <a:ln w="12700">
-            <a:solidFill>
-              <a:srgbClr val="16A34A"/>
+            <a:srgbClr val="FEE2E2"/>
+          </a:solidFill>
+          <a:ln w="12700">
+            <a:solidFill>
+              <a:srgbClr val="DC2626"/>
             </a:solidFill>
             <a:prstDash val="solid"/>
           </a:ln>
@@ -37038,13 +37104,13 @@
             <a:r>
               <a:rPr lang="en-US" sz="1100" b="1" dirty="0">
                 <a:solidFill>
-                  <a:srgbClr val="16A34A"/>
+                  <a:srgbClr val="DC2626"/>
                 </a:solidFill>
                 <a:latin typeface="Trebuchet MS" pitchFamily="34" charset="0"/>
                 <a:ea typeface="Trebuchet MS" pitchFamily="34" charset="-122"/>
                 <a:cs typeface="Trebuchet MS" pitchFamily="34" charset="-120"/>
               </a:rPr>
-              <a:t>TRUE</a:t>
+              <a:t>FALSE</a:t>
             </a:r>
             <a:endParaRPr lang="en-US" sz="1100" dirty="0"/>
           </a:p>
@@ -37117,7 +37183,7 @@
                 <a:ea typeface="Calibri" pitchFamily="34" charset="-122"/>
                 <a:cs typeface="Calibri" pitchFamily="34" charset="-120"/>
               </a:rPr>
-              <a:t>3.  The word 'sweetly' contains the root 'sweet' plus the suffix '-ly'.</a:t>
+              <a:t>3.  'Sweetheart' is a compound word that contains the root 'sweet'.</a:t>
             </a:r>
             <a:endParaRPr lang="en-US" sz="1300" dirty="0"/>
           </a:p>
@@ -37256,7 +37322,7 @@
                 <a:ea typeface="Calibri" pitchFamily="34" charset="-122"/>
                 <a:cs typeface="Calibri" pitchFamily="34" charset="-120"/>
               </a:rPr>
-              <a:t>4.  The word 'unsweetened' means something that has been made extra sweet.</a:t>
+              <a:t>4.  The root 'sweet' comes from the Greek language.</a:t>
             </a:r>
             <a:endParaRPr lang="en-US" sz="1300" dirty="0"/>
           </a:p>
@@ -37395,7 +37461,7 @@
                 <a:ea typeface="Calibri" pitchFamily="34" charset="-122"/>
                 <a:cs typeface="Calibri" pitchFamily="34" charset="-120"/>
               </a:rPr>
-              <a:t>5.  The root 'sweet' comes from the Greek language.</a:t>
+              <a:t>5.  The word 'sweetly' contains the root 'sweet' plus the suffix '-ly'.</a:t>
             </a:r>
             <a:endParaRPr lang="en-US" sz="1300" dirty="0"/>
           </a:p>
@@ -37418,11 +37484,11 @@
             </a:avLst>
           </a:prstGeom>
           <a:solidFill>
-            <a:srgbClr val="FEE2E2"/>
-          </a:solidFill>
-          <a:ln w="12700">
-            <a:solidFill>
-              <a:srgbClr val="DC2626"/>
+            <a:srgbClr val="DCFCE7"/>
+          </a:solidFill>
+          <a:ln w="12700">
+            <a:solidFill>
+              <a:srgbClr val="16A34A"/>
             </a:solidFill>
             <a:prstDash val="solid"/>
           </a:ln>
@@ -37455,13 +37521,13 @@
             <a:r>
               <a:rPr lang="en-US" sz="1100" b="1" dirty="0">
                 <a:solidFill>
-                  <a:srgbClr val="DC2626"/>
+                  <a:srgbClr val="16A34A"/>
                 </a:solidFill>
                 <a:latin typeface="Trebuchet MS" pitchFamily="34" charset="0"/>
                 <a:ea typeface="Trebuchet MS" pitchFamily="34" charset="-122"/>
                 <a:cs typeface="Trebuchet MS" pitchFamily="34" charset="-120"/>
               </a:rPr>
-              <a:t>FALSE</a:t>
+              <a:t>TRUE</a:t>
             </a:r>
             <a:endParaRPr lang="en-US" sz="1100" dirty="0"/>
           </a:p>
